--- a/cursos/recursos/formacion-ajedrez/05-uso-y-control-del-reloj.pptx
+++ b/cursos/recursos/formacion-ajedrez/05-uso-y-control-del-reloj.pptx
@@ -10,6 +10,24 @@
     <p:sldId id="258" r:id="rId9"/>
     <p:sldId id="259" r:id="rId10"/>
     <p:sldId id="260" r:id="rId11"/>
+    <p:sldId id="261" r:id="rId12"/>
+    <p:sldId id="262" r:id="rId13"/>
+    <p:sldId id="263" r:id="rId14"/>
+    <p:sldId id="264" r:id="rId15"/>
+    <p:sldId id="265" r:id="rId16"/>
+    <p:sldId id="266" r:id="rId17"/>
+    <p:sldId id="267" r:id="rId18"/>
+    <p:sldId id="268" r:id="rId19"/>
+    <p:sldId id="269" r:id="rId20"/>
+    <p:sldId id="270" r:id="rId21"/>
+    <p:sldId id="271" r:id="rId22"/>
+    <p:sldId id="272" r:id="rId23"/>
+    <p:sldId id="273" r:id="rId24"/>
+    <p:sldId id="274" r:id="rId25"/>
+    <p:sldId id="275" r:id="rId26"/>
+    <p:sldId id="276" r:id="rId27"/>
+    <p:sldId id="277" r:id="rId28"/>
+    <p:sldId id="278" r:id="rId29"/>
   </p:sldIdLst>
   <p:sldSz cx="12191695" cy="6858000" type="screen4x3"/>
   <p:notesSz cx="6858000" cy="9144000"/>
@@ -3481,6 +3499,2246 @@
 </p:sld>
 </file>
 
+<file path=ppt/slides/slide10.xml><?xml version="1.0" encoding="utf-8"?>
+<p:sld xmlns:a="http://schemas.openxmlformats.org/drawingml/2006/main" xmlns:p="http://schemas.openxmlformats.org/presentationml/2006/main" xmlns:r="http://schemas.openxmlformats.org/officeDocument/2006/relationships">
+  <p:cSld>
+    <p:spTree>
+      <p:nvGrpSpPr>
+        <p:cNvPr id="1" name=""/>
+        <p:cNvGrpSpPr/>
+        <p:nvPr/>
+      </p:nvGrpSpPr>
+      <p:grpSpPr/>
+      <p:sp>
+        <p:nvSpPr>
+          <p:cNvPr id="2" name="Oval 1"/>
+          <p:cNvSpPr/>
+          <p:nvPr/>
+        </p:nvSpPr>
+        <p:spPr>
+          <a:xfrm>
+            <a:off x="548640" y="502920"/>
+            <a:ext cx="502920" cy="502920"/>
+          </a:xfrm>
+          <a:prstGeom prst="ellipse">
+            <a:avLst/>
+          </a:prstGeom>
+          <a:solidFill>
+            <a:srgbClr val="DE911D"/>
+          </a:solidFill>
+          <a:ln>
+            <a:noFill/>
+          </a:ln>
+          <a:effectLst/>
+        </p:spPr>
+        <p:style>
+          <a:lnRef idx="1">
+            <a:schemeClr val="accent1"/>
+          </a:lnRef>
+          <a:fillRef idx="3">
+            <a:schemeClr val="accent1"/>
+          </a:fillRef>
+          <a:effectRef idx="2">
+            <a:schemeClr val="accent1"/>
+          </a:effectRef>
+          <a:fontRef idx="minor">
+            <a:schemeClr val="lt1"/>
+          </a:fontRef>
+        </p:style>
+        <p:txBody>
+          <a:bodyPr rtlCol="0" anchor="ctr"/>
+          <a:lstStyle/>
+          <a:p>
+            <a:pPr algn="ctr"/>
+          </a:p>
+        </p:txBody>
+      </p:sp>
+      <p:sp>
+        <p:nvSpPr>
+          <p:cNvPr id="3" name="TextBox 2"/>
+          <p:cNvSpPr txBox="1"/>
+          <p:nvPr/>
+        </p:nvSpPr>
+        <p:spPr>
+          <a:xfrm>
+            <a:off x="548640" y="502920"/>
+            <a:ext cx="502920" cy="502920"/>
+          </a:xfrm>
+          <a:prstGeom prst="rect">
+            <a:avLst/>
+          </a:prstGeom>
+          <a:noFill/>
+        </p:spPr>
+        <p:txBody>
+          <a:bodyPr wrap="square">
+            <a:spAutoFit/>
+          </a:bodyPr>
+          <a:lstStyle/>
+          <a:p>
+            <a:pPr algn="ctr"/>
+            <a:r>
+              <a:rPr sz="2000" b="0">
+                <a:solidFill>
+                  <a:srgbClr val="0A1F33"/>
+                </a:solidFill>
+                <a:latin typeface="Calibri"/>
+              </a:rPr>
+              <a:t>?</a:t>
+            </a:r>
+          </a:p>
+        </p:txBody>
+      </p:sp>
+      <p:sp>
+        <p:nvSpPr>
+          <p:cNvPr id="4" name="TextBox 3"/>
+          <p:cNvSpPr txBox="1"/>
+          <p:nvPr/>
+        </p:nvSpPr>
+        <p:spPr>
+          <a:xfrm>
+            <a:off x="1234440" y="530352"/>
+            <a:ext cx="9144000" cy="457200"/>
+          </a:xfrm>
+          <a:prstGeom prst="rect">
+            <a:avLst/>
+          </a:prstGeom>
+          <a:noFill/>
+        </p:spPr>
+        <p:txBody>
+          <a:bodyPr wrap="square">
+            <a:spAutoFit/>
+          </a:bodyPr>
+          <a:lstStyle/>
+          <a:p>
+            <a:r>
+              <a:rPr sz="1400" b="1">
+                <a:solidFill>
+                  <a:srgbClr val="DE911D"/>
+                </a:solidFill>
+                <a:latin typeface="Calibri"/>
+              </a:rPr>
+              <a:t>CASO 2 · ¿QUÉ DECIDE LA PERSONA ÁRBITRA?</a:t>
+            </a:r>
+          </a:p>
+        </p:txBody>
+      </p:sp>
+      <p:sp>
+        <p:nvSpPr>
+          <p:cNvPr id="5" name="TextBox 4"/>
+          <p:cNvSpPr txBox="1"/>
+          <p:nvPr/>
+        </p:nvSpPr>
+        <p:spPr>
+          <a:xfrm>
+            <a:off x="548640" y="1051560"/>
+            <a:ext cx="11064240" cy="822960"/>
+          </a:xfrm>
+          <a:prstGeom prst="rect">
+            <a:avLst/>
+          </a:prstGeom>
+          <a:noFill/>
+        </p:spPr>
+        <p:txBody>
+          <a:bodyPr wrap="square">
+            <a:spAutoFit/>
+          </a:bodyPr>
+          <a:lstStyle/>
+          <a:p>
+            <a:r>
+              <a:rPr sz="2600" b="1">
+                <a:solidFill>
+                  <a:srgbClr val="0A1F33"/>
+                </a:solidFill>
+                <a:latin typeface="Cambria"/>
+              </a:rPr>
+              <a:t>Presionar antes de mover</a:t>
+            </a:r>
+          </a:p>
+        </p:txBody>
+      </p:sp>
+      <p:sp>
+        <p:nvSpPr>
+          <p:cNvPr id="6" name="Rectangle 5"/>
+          <p:cNvSpPr/>
+          <p:nvPr/>
+        </p:nvSpPr>
+        <p:spPr>
+          <a:xfrm>
+            <a:off x="548640" y="1965960"/>
+            <a:ext cx="11064240" cy="4206240"/>
+          </a:xfrm>
+          <a:prstGeom prst="rect">
+            <a:avLst/>
+          </a:prstGeom>
+          <a:solidFill>
+            <a:srgbClr val="F0F4F8"/>
+          </a:solidFill>
+          <a:ln>
+            <a:noFill/>
+          </a:ln>
+          <a:effectLst/>
+        </p:spPr>
+        <p:style>
+          <a:lnRef idx="1">
+            <a:schemeClr val="accent1"/>
+          </a:lnRef>
+          <a:fillRef idx="3">
+            <a:schemeClr val="accent1"/>
+          </a:fillRef>
+          <a:effectRef idx="2">
+            <a:schemeClr val="accent1"/>
+          </a:effectRef>
+          <a:fontRef idx="minor">
+            <a:schemeClr val="lt1"/>
+          </a:fontRef>
+        </p:style>
+        <p:txBody>
+          <a:bodyPr rtlCol="0" anchor="ctr"/>
+          <a:lstStyle/>
+          <a:p>
+            <a:pPr algn="ctr"/>
+          </a:p>
+        </p:txBody>
+      </p:sp>
+      <p:sp>
+        <p:nvSpPr>
+          <p:cNvPr id="7" name="TextBox 6"/>
+          <p:cNvSpPr txBox="1"/>
+          <p:nvPr/>
+        </p:nvSpPr>
+        <p:spPr>
+          <a:xfrm>
+            <a:off x="914400" y="2240280"/>
+            <a:ext cx="10332720" cy="3749039"/>
+          </a:xfrm>
+          <a:prstGeom prst="rect">
+            <a:avLst/>
+          </a:prstGeom>
+          <a:noFill/>
+        </p:spPr>
+        <p:txBody>
+          <a:bodyPr wrap="square">
+            <a:spAutoFit/>
+          </a:bodyPr>
+          <a:lstStyle/>
+          <a:p>
+            <a:r>
+              <a:rPr sz="2000" b="0">
+                <a:solidFill>
+                  <a:srgbClr val="334E68"/>
+                </a:solidFill>
+                <a:latin typeface="Calibri"/>
+              </a:rPr>
+              <a:t>En apuro de tiempo, un jugador presiona el reloj antes de soltar la pieza.</a:t>
+            </a:r>
+          </a:p>
+        </p:txBody>
+      </p:sp>
+    </p:spTree>
+  </p:cSld>
+  <p:clrMapOvr>
+    <a:masterClrMapping/>
+  </p:clrMapOvr>
+</p:sld>
+</file>
+
+<file path=ppt/slides/slide11.xml><?xml version="1.0" encoding="utf-8"?>
+<p:sld xmlns:a="http://schemas.openxmlformats.org/drawingml/2006/main" xmlns:p="http://schemas.openxmlformats.org/presentationml/2006/main" xmlns:r="http://schemas.openxmlformats.org/officeDocument/2006/relationships">
+  <p:cSld>
+    <p:spTree>
+      <p:nvGrpSpPr>
+        <p:cNvPr id="1" name=""/>
+        <p:cNvGrpSpPr/>
+        <p:nvPr/>
+      </p:nvGrpSpPr>
+      <p:grpSpPr/>
+      <p:sp>
+        <p:nvSpPr>
+          <p:cNvPr id="2" name="Rectangle 1"/>
+          <p:cNvSpPr/>
+          <p:nvPr/>
+        </p:nvSpPr>
+        <p:spPr>
+          <a:xfrm>
+            <a:off x="0" y="0"/>
+            <a:ext cx="12191695" cy="6858000"/>
+          </a:xfrm>
+          <a:prstGeom prst="rect">
+            <a:avLst/>
+          </a:prstGeom>
+          <a:solidFill>
+            <a:srgbClr val="102A43"/>
+          </a:solidFill>
+          <a:ln>
+            <a:noFill/>
+          </a:ln>
+          <a:effectLst/>
+        </p:spPr>
+        <p:style>
+          <a:lnRef idx="1">
+            <a:schemeClr val="accent1"/>
+          </a:lnRef>
+          <a:fillRef idx="3">
+            <a:schemeClr val="accent1"/>
+          </a:fillRef>
+          <a:effectRef idx="2">
+            <a:schemeClr val="accent1"/>
+          </a:effectRef>
+          <a:fontRef idx="minor">
+            <a:schemeClr val="lt1"/>
+          </a:fontRef>
+        </p:style>
+        <p:txBody>
+          <a:bodyPr rtlCol="0" anchor="ctr"/>
+          <a:lstStyle/>
+          <a:p>
+            <a:pPr algn="ctr"/>
+          </a:p>
+        </p:txBody>
+      </p:sp>
+      <p:sp>
+        <p:nvSpPr>
+          <p:cNvPr id="3" name="TextBox 2"/>
+          <p:cNvSpPr txBox="1"/>
+          <p:nvPr/>
+        </p:nvSpPr>
+        <p:spPr>
+          <a:xfrm>
+            <a:off x="548640" y="548640"/>
+            <a:ext cx="11064240" cy="457200"/>
+          </a:xfrm>
+          <a:prstGeom prst="rect">
+            <a:avLst/>
+          </a:prstGeom>
+          <a:noFill/>
+        </p:spPr>
+        <p:txBody>
+          <a:bodyPr wrap="square">
+            <a:spAutoFit/>
+          </a:bodyPr>
+          <a:lstStyle/>
+          <a:p>
+            <a:r>
+              <a:rPr sz="1400" b="1">
+                <a:solidFill>
+                  <a:srgbClr val="F0B429"/>
+                </a:solidFill>
+                <a:latin typeface="Calibri"/>
+              </a:rPr>
+              <a:t>CASO 2 · DECISIÓN</a:t>
+            </a:r>
+          </a:p>
+        </p:txBody>
+      </p:sp>
+      <p:sp>
+        <p:nvSpPr>
+          <p:cNvPr id="4" name="TextBox 3"/>
+          <p:cNvSpPr txBox="1"/>
+          <p:nvPr/>
+        </p:nvSpPr>
+        <p:spPr>
+          <a:xfrm>
+            <a:off x="548640" y="1051560"/>
+            <a:ext cx="11064240" cy="822960"/>
+          </a:xfrm>
+          <a:prstGeom prst="rect">
+            <a:avLst/>
+          </a:prstGeom>
+          <a:noFill/>
+        </p:spPr>
+        <p:txBody>
+          <a:bodyPr wrap="square">
+            <a:spAutoFit/>
+          </a:bodyPr>
+          <a:lstStyle/>
+          <a:p>
+            <a:r>
+              <a:rPr sz="2600" b="1">
+                <a:solidFill>
+                  <a:srgbClr val="FFFFFF"/>
+                </a:solidFill>
+                <a:latin typeface="Cambria"/>
+              </a:rPr>
+              <a:t>Presionar antes de mover</a:t>
+            </a:r>
+          </a:p>
+        </p:txBody>
+      </p:sp>
+      <p:sp>
+        <p:nvSpPr>
+          <p:cNvPr id="5" name="TextBox 4"/>
+          <p:cNvSpPr txBox="1"/>
+          <p:nvPr/>
+        </p:nvSpPr>
+        <p:spPr>
+          <a:xfrm>
+            <a:off x="548640" y="2103120"/>
+            <a:ext cx="11064240" cy="3931920"/>
+          </a:xfrm>
+          <a:prstGeom prst="rect">
+            <a:avLst/>
+          </a:prstGeom>
+          <a:noFill/>
+        </p:spPr>
+        <p:txBody>
+          <a:bodyPr wrap="square">
+            <a:spAutoFit/>
+          </a:bodyPr>
+          <a:lstStyle/>
+          <a:p>
+            <a:r>
+              <a:rPr sz="2000" b="0">
+                <a:solidFill>
+                  <a:srgbClr val="CADCFC"/>
+                </a:solidFill>
+                <a:latin typeface="Calibri"/>
+              </a:rPr>
+              <a:t>Es un manejo indebido del reloj: el árbitro interviene y aplica una sanción del art. 12.9, de menor a mayor.</a:t>
+            </a:r>
+          </a:p>
+        </p:txBody>
+      </p:sp>
+      <p:sp>
+        <p:nvSpPr>
+          <p:cNvPr id="6" name="TextBox 5"/>
+          <p:cNvSpPr txBox="1"/>
+          <p:nvPr/>
+        </p:nvSpPr>
+        <p:spPr>
+          <a:xfrm>
+            <a:off x="548640" y="6263640"/>
+            <a:ext cx="11064240" cy="365760"/>
+          </a:xfrm>
+          <a:prstGeom prst="rect">
+            <a:avLst/>
+          </a:prstGeom>
+          <a:noFill/>
+        </p:spPr>
+        <p:txBody>
+          <a:bodyPr wrap="square">
+            <a:spAutoFit/>
+          </a:bodyPr>
+          <a:lstStyle/>
+          <a:p>
+            <a:r>
+              <a:rPr sz="1100" b="0">
+                <a:solidFill>
+                  <a:srgbClr val="9FB3C8"/>
+                </a:solidFill>
+                <a:latin typeface="Calibri"/>
+              </a:rPr>
+              <a:t>Fuente: Leyes del Ajedrez 2023 (Handbook E.I.01), art. 6.2.1, 6.2.4 y 12.9</a:t>
+            </a:r>
+          </a:p>
+        </p:txBody>
+      </p:sp>
+    </p:spTree>
+  </p:cSld>
+  <p:clrMapOvr>
+    <a:masterClrMapping/>
+  </p:clrMapOvr>
+</p:sld>
+</file>
+
+<file path=ppt/slides/slide12.xml><?xml version="1.0" encoding="utf-8"?>
+<p:sld xmlns:a="http://schemas.openxmlformats.org/drawingml/2006/main" xmlns:p="http://schemas.openxmlformats.org/presentationml/2006/main" xmlns:r="http://schemas.openxmlformats.org/officeDocument/2006/relationships">
+  <p:cSld>
+    <p:spTree>
+      <p:nvGrpSpPr>
+        <p:cNvPr id="1" name=""/>
+        <p:cNvGrpSpPr/>
+        <p:nvPr/>
+      </p:nvGrpSpPr>
+      <p:grpSpPr/>
+      <p:sp>
+        <p:nvSpPr>
+          <p:cNvPr id="2" name="Oval 1"/>
+          <p:cNvSpPr/>
+          <p:nvPr/>
+        </p:nvSpPr>
+        <p:spPr>
+          <a:xfrm>
+            <a:off x="548640" y="502920"/>
+            <a:ext cx="502920" cy="502920"/>
+          </a:xfrm>
+          <a:prstGeom prst="ellipse">
+            <a:avLst/>
+          </a:prstGeom>
+          <a:solidFill>
+            <a:srgbClr val="DE911D"/>
+          </a:solidFill>
+          <a:ln>
+            <a:noFill/>
+          </a:ln>
+          <a:effectLst/>
+        </p:spPr>
+        <p:style>
+          <a:lnRef idx="1">
+            <a:schemeClr val="accent1"/>
+          </a:lnRef>
+          <a:fillRef idx="3">
+            <a:schemeClr val="accent1"/>
+          </a:fillRef>
+          <a:effectRef idx="2">
+            <a:schemeClr val="accent1"/>
+          </a:effectRef>
+          <a:fontRef idx="minor">
+            <a:schemeClr val="lt1"/>
+          </a:fontRef>
+        </p:style>
+        <p:txBody>
+          <a:bodyPr rtlCol="0" anchor="ctr"/>
+          <a:lstStyle/>
+          <a:p>
+            <a:pPr algn="ctr"/>
+          </a:p>
+        </p:txBody>
+      </p:sp>
+      <p:sp>
+        <p:nvSpPr>
+          <p:cNvPr id="3" name="TextBox 2"/>
+          <p:cNvSpPr txBox="1"/>
+          <p:nvPr/>
+        </p:nvSpPr>
+        <p:spPr>
+          <a:xfrm>
+            <a:off x="548640" y="502920"/>
+            <a:ext cx="502920" cy="502920"/>
+          </a:xfrm>
+          <a:prstGeom prst="rect">
+            <a:avLst/>
+          </a:prstGeom>
+          <a:noFill/>
+        </p:spPr>
+        <p:txBody>
+          <a:bodyPr wrap="square">
+            <a:spAutoFit/>
+          </a:bodyPr>
+          <a:lstStyle/>
+          <a:p>
+            <a:pPr algn="ctr"/>
+            <a:r>
+              <a:rPr sz="2000" b="0">
+                <a:solidFill>
+                  <a:srgbClr val="0A1F33"/>
+                </a:solidFill>
+                <a:latin typeface="Calibri"/>
+              </a:rPr>
+              <a:t>?</a:t>
+            </a:r>
+          </a:p>
+        </p:txBody>
+      </p:sp>
+      <p:sp>
+        <p:nvSpPr>
+          <p:cNvPr id="4" name="TextBox 3"/>
+          <p:cNvSpPr txBox="1"/>
+          <p:nvPr/>
+        </p:nvSpPr>
+        <p:spPr>
+          <a:xfrm>
+            <a:off x="1234440" y="530352"/>
+            <a:ext cx="9144000" cy="457200"/>
+          </a:xfrm>
+          <a:prstGeom prst="rect">
+            <a:avLst/>
+          </a:prstGeom>
+          <a:noFill/>
+        </p:spPr>
+        <p:txBody>
+          <a:bodyPr wrap="square">
+            <a:spAutoFit/>
+          </a:bodyPr>
+          <a:lstStyle/>
+          <a:p>
+            <a:r>
+              <a:rPr sz="1400" b="1">
+                <a:solidFill>
+                  <a:srgbClr val="DE911D"/>
+                </a:solidFill>
+                <a:latin typeface="Calibri"/>
+              </a:rPr>
+              <a:t>CASO 3 · ¿QUÉ DECIDE LA PERSONA ÁRBITRA?</a:t>
+            </a:r>
+          </a:p>
+        </p:txBody>
+      </p:sp>
+      <p:sp>
+        <p:nvSpPr>
+          <p:cNvPr id="5" name="TextBox 4"/>
+          <p:cNvSpPr txBox="1"/>
+          <p:nvPr/>
+        </p:nvSpPr>
+        <p:spPr>
+          <a:xfrm>
+            <a:off x="548640" y="1051560"/>
+            <a:ext cx="11064240" cy="822960"/>
+          </a:xfrm>
+          <a:prstGeom prst="rect">
+            <a:avLst/>
+          </a:prstGeom>
+          <a:noFill/>
+        </p:spPr>
+        <p:txBody>
+          <a:bodyPr wrap="square">
+            <a:spAutoFit/>
+          </a:bodyPr>
+          <a:lstStyle/>
+          <a:p>
+            <a:r>
+              <a:rPr sz="2600" b="1">
+                <a:solidFill>
+                  <a:srgbClr val="0A1F33"/>
+                </a:solidFill>
+                <a:latin typeface="Cambria"/>
+              </a:rPr>
+              <a:t>Bandera con rey y caballo</a:t>
+            </a:r>
+          </a:p>
+        </p:txBody>
+      </p:sp>
+      <p:sp>
+        <p:nvSpPr>
+          <p:cNvPr id="6" name="Rectangle 5"/>
+          <p:cNvSpPr/>
+          <p:nvPr/>
+        </p:nvSpPr>
+        <p:spPr>
+          <a:xfrm>
+            <a:off x="548640" y="1965960"/>
+            <a:ext cx="11064240" cy="4206240"/>
+          </a:xfrm>
+          <a:prstGeom prst="rect">
+            <a:avLst/>
+          </a:prstGeom>
+          <a:solidFill>
+            <a:srgbClr val="F0F4F8"/>
+          </a:solidFill>
+          <a:ln>
+            <a:noFill/>
+          </a:ln>
+          <a:effectLst/>
+        </p:spPr>
+        <p:style>
+          <a:lnRef idx="1">
+            <a:schemeClr val="accent1"/>
+          </a:lnRef>
+          <a:fillRef idx="3">
+            <a:schemeClr val="accent1"/>
+          </a:fillRef>
+          <a:effectRef idx="2">
+            <a:schemeClr val="accent1"/>
+          </a:effectRef>
+          <a:fontRef idx="minor">
+            <a:schemeClr val="lt1"/>
+          </a:fontRef>
+        </p:style>
+        <p:txBody>
+          <a:bodyPr rtlCol="0" anchor="ctr"/>
+          <a:lstStyle/>
+          <a:p>
+            <a:pPr algn="ctr"/>
+          </a:p>
+        </p:txBody>
+      </p:sp>
+      <p:sp>
+        <p:nvSpPr>
+          <p:cNvPr id="7" name="TextBox 6"/>
+          <p:cNvSpPr txBox="1"/>
+          <p:nvPr/>
+        </p:nvSpPr>
+        <p:spPr>
+          <a:xfrm>
+            <a:off x="914400" y="2240280"/>
+            <a:ext cx="10332720" cy="3749039"/>
+          </a:xfrm>
+          <a:prstGeom prst="rect">
+            <a:avLst/>
+          </a:prstGeom>
+          <a:noFill/>
+        </p:spPr>
+        <p:txBody>
+          <a:bodyPr wrap="square">
+            <a:spAutoFit/>
+          </a:bodyPr>
+          <a:lstStyle/>
+          <a:p>
+            <a:r>
+              <a:rPr sz="2000" b="0">
+                <a:solidFill>
+                  <a:srgbClr val="334E68"/>
+                </a:solidFill>
+                <a:latin typeface="Calibri"/>
+              </a:rPr>
+              <a:t>Cae la bandera de las blancas. Las negras solo tienen rey y caballo, y las blancas tienen rey y peón.</a:t>
+            </a:r>
+          </a:p>
+        </p:txBody>
+      </p:sp>
+    </p:spTree>
+  </p:cSld>
+  <p:clrMapOvr>
+    <a:masterClrMapping/>
+  </p:clrMapOvr>
+</p:sld>
+</file>
+
+<file path=ppt/slides/slide13.xml><?xml version="1.0" encoding="utf-8"?>
+<p:sld xmlns:a="http://schemas.openxmlformats.org/drawingml/2006/main" xmlns:p="http://schemas.openxmlformats.org/presentationml/2006/main" xmlns:r="http://schemas.openxmlformats.org/officeDocument/2006/relationships">
+  <p:cSld>
+    <p:spTree>
+      <p:nvGrpSpPr>
+        <p:cNvPr id="1" name=""/>
+        <p:cNvGrpSpPr/>
+        <p:nvPr/>
+      </p:nvGrpSpPr>
+      <p:grpSpPr/>
+      <p:sp>
+        <p:nvSpPr>
+          <p:cNvPr id="2" name="Rectangle 1"/>
+          <p:cNvSpPr/>
+          <p:nvPr/>
+        </p:nvSpPr>
+        <p:spPr>
+          <a:xfrm>
+            <a:off x="0" y="0"/>
+            <a:ext cx="12191695" cy="6858000"/>
+          </a:xfrm>
+          <a:prstGeom prst="rect">
+            <a:avLst/>
+          </a:prstGeom>
+          <a:solidFill>
+            <a:srgbClr val="102A43"/>
+          </a:solidFill>
+          <a:ln>
+            <a:noFill/>
+          </a:ln>
+          <a:effectLst/>
+        </p:spPr>
+        <p:style>
+          <a:lnRef idx="1">
+            <a:schemeClr val="accent1"/>
+          </a:lnRef>
+          <a:fillRef idx="3">
+            <a:schemeClr val="accent1"/>
+          </a:fillRef>
+          <a:effectRef idx="2">
+            <a:schemeClr val="accent1"/>
+          </a:effectRef>
+          <a:fontRef idx="minor">
+            <a:schemeClr val="lt1"/>
+          </a:fontRef>
+        </p:style>
+        <p:txBody>
+          <a:bodyPr rtlCol="0" anchor="ctr"/>
+          <a:lstStyle/>
+          <a:p>
+            <a:pPr algn="ctr"/>
+          </a:p>
+        </p:txBody>
+      </p:sp>
+      <p:sp>
+        <p:nvSpPr>
+          <p:cNvPr id="3" name="TextBox 2"/>
+          <p:cNvSpPr txBox="1"/>
+          <p:nvPr/>
+        </p:nvSpPr>
+        <p:spPr>
+          <a:xfrm>
+            <a:off x="548640" y="548640"/>
+            <a:ext cx="11064240" cy="457200"/>
+          </a:xfrm>
+          <a:prstGeom prst="rect">
+            <a:avLst/>
+          </a:prstGeom>
+          <a:noFill/>
+        </p:spPr>
+        <p:txBody>
+          <a:bodyPr wrap="square">
+            <a:spAutoFit/>
+          </a:bodyPr>
+          <a:lstStyle/>
+          <a:p>
+            <a:r>
+              <a:rPr sz="1400" b="1">
+                <a:solidFill>
+                  <a:srgbClr val="F0B429"/>
+                </a:solidFill>
+                <a:latin typeface="Calibri"/>
+              </a:rPr>
+              <a:t>CASO 3 · DECISIÓN</a:t>
+            </a:r>
+          </a:p>
+        </p:txBody>
+      </p:sp>
+      <p:sp>
+        <p:nvSpPr>
+          <p:cNvPr id="4" name="TextBox 3"/>
+          <p:cNvSpPr txBox="1"/>
+          <p:nvPr/>
+        </p:nvSpPr>
+        <p:spPr>
+          <a:xfrm>
+            <a:off x="548640" y="1051560"/>
+            <a:ext cx="11064240" cy="822960"/>
+          </a:xfrm>
+          <a:prstGeom prst="rect">
+            <a:avLst/>
+          </a:prstGeom>
+          <a:noFill/>
+        </p:spPr>
+        <p:txBody>
+          <a:bodyPr wrap="square">
+            <a:spAutoFit/>
+          </a:bodyPr>
+          <a:lstStyle/>
+          <a:p>
+            <a:r>
+              <a:rPr sz="2600" b="1">
+                <a:solidFill>
+                  <a:srgbClr val="FFFFFF"/>
+                </a:solidFill>
+                <a:latin typeface="Cambria"/>
+              </a:rPr>
+              <a:t>Bandera con rey y caballo</a:t>
+            </a:r>
+          </a:p>
+        </p:txBody>
+      </p:sp>
+      <p:sp>
+        <p:nvSpPr>
+          <p:cNvPr id="5" name="TextBox 4"/>
+          <p:cNvSpPr txBox="1"/>
+          <p:nvPr/>
+        </p:nvSpPr>
+        <p:spPr>
+          <a:xfrm>
+            <a:off x="548640" y="2103120"/>
+            <a:ext cx="11064240" cy="3931920"/>
+          </a:xfrm>
+          <a:prstGeom prst="rect">
+            <a:avLst/>
+          </a:prstGeom>
+          <a:noFill/>
+        </p:spPr>
+        <p:txBody>
+          <a:bodyPr wrap="square">
+            <a:spAutoFit/>
+          </a:bodyPr>
+          <a:lstStyle/>
+          <a:p>
+            <a:r>
+              <a:rPr sz="1600" b="0">
+                <a:solidFill>
+                  <a:srgbClr val="CADCFC"/>
+                </a:solidFill>
+                <a:latin typeface="Calibri"/>
+              </a:rPr>
+              <a:t>Pierden las blancas: con ese material existe al menos una serie de jugadas legales que termina en mate. Por ejemplo, rey blanco en h1 con su peón en h2, rey negro en f1 y caballo negro en f2: el peón le quita al rey su última casilla. Solo serían tablas si el rival no pudiera dar mate de ninguna manera, como con rey y caballo contra rey solo.</a:t>
+            </a:r>
+          </a:p>
+        </p:txBody>
+      </p:sp>
+      <p:sp>
+        <p:nvSpPr>
+          <p:cNvPr id="6" name="TextBox 5"/>
+          <p:cNvSpPr txBox="1"/>
+          <p:nvPr/>
+        </p:nvSpPr>
+        <p:spPr>
+          <a:xfrm>
+            <a:off x="548640" y="6263640"/>
+            <a:ext cx="11064240" cy="365760"/>
+          </a:xfrm>
+          <a:prstGeom prst="rect">
+            <a:avLst/>
+          </a:prstGeom>
+          <a:noFill/>
+        </p:spPr>
+        <p:txBody>
+          <a:bodyPr wrap="square">
+            <a:spAutoFit/>
+          </a:bodyPr>
+          <a:lstStyle/>
+          <a:p>
+            <a:r>
+              <a:rPr sz="1100" b="0">
+                <a:solidFill>
+                  <a:srgbClr val="9FB3C8"/>
+                </a:solidFill>
+                <a:latin typeface="Calibri"/>
+              </a:rPr>
+              <a:t>Fuente: Leyes del Ajedrez 2023 (Handbook E.I.01), art. 6.9</a:t>
+            </a:r>
+          </a:p>
+        </p:txBody>
+      </p:sp>
+    </p:spTree>
+  </p:cSld>
+  <p:clrMapOvr>
+    <a:masterClrMapping/>
+  </p:clrMapOvr>
+</p:sld>
+</file>
+
+<file path=ppt/slides/slide14.xml><?xml version="1.0" encoding="utf-8"?>
+<p:sld xmlns:a="http://schemas.openxmlformats.org/drawingml/2006/main" xmlns:p="http://schemas.openxmlformats.org/presentationml/2006/main" xmlns:r="http://schemas.openxmlformats.org/officeDocument/2006/relationships">
+  <p:cSld>
+    <p:spTree>
+      <p:nvGrpSpPr>
+        <p:cNvPr id="1" name=""/>
+        <p:cNvGrpSpPr/>
+        <p:nvPr/>
+      </p:nvGrpSpPr>
+      <p:grpSpPr/>
+      <p:sp>
+        <p:nvSpPr>
+          <p:cNvPr id="2" name="Oval 1"/>
+          <p:cNvSpPr/>
+          <p:nvPr/>
+        </p:nvSpPr>
+        <p:spPr>
+          <a:xfrm>
+            <a:off x="548640" y="502920"/>
+            <a:ext cx="502920" cy="502920"/>
+          </a:xfrm>
+          <a:prstGeom prst="ellipse">
+            <a:avLst/>
+          </a:prstGeom>
+          <a:solidFill>
+            <a:srgbClr val="DE911D"/>
+          </a:solidFill>
+          <a:ln>
+            <a:noFill/>
+          </a:ln>
+          <a:effectLst/>
+        </p:spPr>
+        <p:style>
+          <a:lnRef idx="1">
+            <a:schemeClr val="accent1"/>
+          </a:lnRef>
+          <a:fillRef idx="3">
+            <a:schemeClr val="accent1"/>
+          </a:fillRef>
+          <a:effectRef idx="2">
+            <a:schemeClr val="accent1"/>
+          </a:effectRef>
+          <a:fontRef idx="minor">
+            <a:schemeClr val="lt1"/>
+          </a:fontRef>
+        </p:style>
+        <p:txBody>
+          <a:bodyPr rtlCol="0" anchor="ctr"/>
+          <a:lstStyle/>
+          <a:p>
+            <a:pPr algn="ctr"/>
+          </a:p>
+        </p:txBody>
+      </p:sp>
+      <p:sp>
+        <p:nvSpPr>
+          <p:cNvPr id="3" name="TextBox 2"/>
+          <p:cNvSpPr txBox="1"/>
+          <p:nvPr/>
+        </p:nvSpPr>
+        <p:spPr>
+          <a:xfrm>
+            <a:off x="548640" y="502920"/>
+            <a:ext cx="502920" cy="502920"/>
+          </a:xfrm>
+          <a:prstGeom prst="rect">
+            <a:avLst/>
+          </a:prstGeom>
+          <a:noFill/>
+        </p:spPr>
+        <p:txBody>
+          <a:bodyPr wrap="square">
+            <a:spAutoFit/>
+          </a:bodyPr>
+          <a:lstStyle/>
+          <a:p>
+            <a:pPr algn="ctr"/>
+            <a:r>
+              <a:rPr sz="2000" b="0">
+                <a:solidFill>
+                  <a:srgbClr val="0A1F33"/>
+                </a:solidFill>
+                <a:latin typeface="Calibri"/>
+              </a:rPr>
+              <a:t>?</a:t>
+            </a:r>
+          </a:p>
+        </p:txBody>
+      </p:sp>
+      <p:sp>
+        <p:nvSpPr>
+          <p:cNvPr id="4" name="TextBox 3"/>
+          <p:cNvSpPr txBox="1"/>
+          <p:nvPr/>
+        </p:nvSpPr>
+        <p:spPr>
+          <a:xfrm>
+            <a:off x="1234440" y="530352"/>
+            <a:ext cx="9144000" cy="457200"/>
+          </a:xfrm>
+          <a:prstGeom prst="rect">
+            <a:avLst/>
+          </a:prstGeom>
+          <a:noFill/>
+        </p:spPr>
+        <p:txBody>
+          <a:bodyPr wrap="square">
+            <a:spAutoFit/>
+          </a:bodyPr>
+          <a:lstStyle/>
+          <a:p>
+            <a:r>
+              <a:rPr sz="1400" b="1">
+                <a:solidFill>
+                  <a:srgbClr val="DE911D"/>
+                </a:solidFill>
+                <a:latin typeface="Calibri"/>
+              </a:rPr>
+              <a:t>CASO 4 · ¿QUÉ DECIDE LA PERSONA ÁRBITRA?</a:t>
+            </a:r>
+          </a:p>
+        </p:txBody>
+      </p:sp>
+      <p:sp>
+        <p:nvSpPr>
+          <p:cNvPr id="5" name="TextBox 4"/>
+          <p:cNvSpPr txBox="1"/>
+          <p:nvPr/>
+        </p:nvSpPr>
+        <p:spPr>
+          <a:xfrm>
+            <a:off x="548640" y="1051560"/>
+            <a:ext cx="11064240" cy="822960"/>
+          </a:xfrm>
+          <a:prstGeom prst="rect">
+            <a:avLst/>
+          </a:prstGeom>
+          <a:noFill/>
+        </p:spPr>
+        <p:txBody>
+          <a:bodyPr wrap="square">
+            <a:spAutoFit/>
+          </a:bodyPr>
+          <a:lstStyle/>
+          <a:p>
+            <a:r>
+              <a:rPr sz="2600" b="1">
+                <a:solidFill>
+                  <a:srgbClr val="0A1F33"/>
+                </a:solidFill>
+                <a:latin typeface="Cambria"/>
+              </a:rPr>
+              <a:t>Reloj con defecto evidente</a:t>
+            </a:r>
+          </a:p>
+        </p:txBody>
+      </p:sp>
+      <p:sp>
+        <p:nvSpPr>
+          <p:cNvPr id="6" name="Rectangle 5"/>
+          <p:cNvSpPr/>
+          <p:nvPr/>
+        </p:nvSpPr>
+        <p:spPr>
+          <a:xfrm>
+            <a:off x="548640" y="1965960"/>
+            <a:ext cx="11064240" cy="4206240"/>
+          </a:xfrm>
+          <a:prstGeom prst="rect">
+            <a:avLst/>
+          </a:prstGeom>
+          <a:solidFill>
+            <a:srgbClr val="F0F4F8"/>
+          </a:solidFill>
+          <a:ln>
+            <a:noFill/>
+          </a:ln>
+          <a:effectLst/>
+        </p:spPr>
+        <p:style>
+          <a:lnRef idx="1">
+            <a:schemeClr val="accent1"/>
+          </a:lnRef>
+          <a:fillRef idx="3">
+            <a:schemeClr val="accent1"/>
+          </a:fillRef>
+          <a:effectRef idx="2">
+            <a:schemeClr val="accent1"/>
+          </a:effectRef>
+          <a:fontRef idx="minor">
+            <a:schemeClr val="lt1"/>
+          </a:fontRef>
+        </p:style>
+        <p:txBody>
+          <a:bodyPr rtlCol="0" anchor="ctr"/>
+          <a:lstStyle/>
+          <a:p>
+            <a:pPr algn="ctr"/>
+          </a:p>
+        </p:txBody>
+      </p:sp>
+      <p:sp>
+        <p:nvSpPr>
+          <p:cNvPr id="7" name="TextBox 6"/>
+          <p:cNvSpPr txBox="1"/>
+          <p:nvPr/>
+        </p:nvSpPr>
+        <p:spPr>
+          <a:xfrm>
+            <a:off x="914400" y="2240280"/>
+            <a:ext cx="10332720" cy="3749039"/>
+          </a:xfrm>
+          <a:prstGeom prst="rect">
+            <a:avLst/>
+          </a:prstGeom>
+          <a:noFill/>
+        </p:spPr>
+        <p:txBody>
+          <a:bodyPr wrap="square">
+            <a:spAutoFit/>
+          </a:bodyPr>
+          <a:lstStyle/>
+          <a:p>
+            <a:r>
+              <a:rPr sz="2000" b="0">
+                <a:solidFill>
+                  <a:srgbClr val="334E68"/>
+                </a:solidFill>
+                <a:latin typeface="Calibri"/>
+              </a:rPr>
+              <a:t>A mitad de partida, la pantalla de un reloj deja de funcionar.</a:t>
+            </a:r>
+          </a:p>
+        </p:txBody>
+      </p:sp>
+    </p:spTree>
+  </p:cSld>
+  <p:clrMapOvr>
+    <a:masterClrMapping/>
+  </p:clrMapOvr>
+</p:sld>
+</file>
+
+<file path=ppt/slides/slide15.xml><?xml version="1.0" encoding="utf-8"?>
+<p:sld xmlns:a="http://schemas.openxmlformats.org/drawingml/2006/main" xmlns:p="http://schemas.openxmlformats.org/presentationml/2006/main" xmlns:r="http://schemas.openxmlformats.org/officeDocument/2006/relationships">
+  <p:cSld>
+    <p:spTree>
+      <p:nvGrpSpPr>
+        <p:cNvPr id="1" name=""/>
+        <p:cNvGrpSpPr/>
+        <p:nvPr/>
+      </p:nvGrpSpPr>
+      <p:grpSpPr/>
+      <p:sp>
+        <p:nvSpPr>
+          <p:cNvPr id="2" name="Rectangle 1"/>
+          <p:cNvSpPr/>
+          <p:nvPr/>
+        </p:nvSpPr>
+        <p:spPr>
+          <a:xfrm>
+            <a:off x="0" y="0"/>
+            <a:ext cx="12191695" cy="6858000"/>
+          </a:xfrm>
+          <a:prstGeom prst="rect">
+            <a:avLst/>
+          </a:prstGeom>
+          <a:solidFill>
+            <a:srgbClr val="102A43"/>
+          </a:solidFill>
+          <a:ln>
+            <a:noFill/>
+          </a:ln>
+          <a:effectLst/>
+        </p:spPr>
+        <p:style>
+          <a:lnRef idx="1">
+            <a:schemeClr val="accent1"/>
+          </a:lnRef>
+          <a:fillRef idx="3">
+            <a:schemeClr val="accent1"/>
+          </a:fillRef>
+          <a:effectRef idx="2">
+            <a:schemeClr val="accent1"/>
+          </a:effectRef>
+          <a:fontRef idx="minor">
+            <a:schemeClr val="lt1"/>
+          </a:fontRef>
+        </p:style>
+        <p:txBody>
+          <a:bodyPr rtlCol="0" anchor="ctr"/>
+          <a:lstStyle/>
+          <a:p>
+            <a:pPr algn="ctr"/>
+          </a:p>
+        </p:txBody>
+      </p:sp>
+      <p:sp>
+        <p:nvSpPr>
+          <p:cNvPr id="3" name="TextBox 2"/>
+          <p:cNvSpPr txBox="1"/>
+          <p:nvPr/>
+        </p:nvSpPr>
+        <p:spPr>
+          <a:xfrm>
+            <a:off x="548640" y="548640"/>
+            <a:ext cx="11064240" cy="457200"/>
+          </a:xfrm>
+          <a:prstGeom prst="rect">
+            <a:avLst/>
+          </a:prstGeom>
+          <a:noFill/>
+        </p:spPr>
+        <p:txBody>
+          <a:bodyPr wrap="square">
+            <a:spAutoFit/>
+          </a:bodyPr>
+          <a:lstStyle/>
+          <a:p>
+            <a:r>
+              <a:rPr sz="1400" b="1">
+                <a:solidFill>
+                  <a:srgbClr val="F0B429"/>
+                </a:solidFill>
+                <a:latin typeface="Calibri"/>
+              </a:rPr>
+              <a:t>CASO 4 · DECISIÓN</a:t>
+            </a:r>
+          </a:p>
+        </p:txBody>
+      </p:sp>
+      <p:sp>
+        <p:nvSpPr>
+          <p:cNvPr id="4" name="TextBox 3"/>
+          <p:cNvSpPr txBox="1"/>
+          <p:nvPr/>
+        </p:nvSpPr>
+        <p:spPr>
+          <a:xfrm>
+            <a:off x="548640" y="1051560"/>
+            <a:ext cx="11064240" cy="822960"/>
+          </a:xfrm>
+          <a:prstGeom prst="rect">
+            <a:avLst/>
+          </a:prstGeom>
+          <a:noFill/>
+        </p:spPr>
+        <p:txBody>
+          <a:bodyPr wrap="square">
+            <a:spAutoFit/>
+          </a:bodyPr>
+          <a:lstStyle/>
+          <a:p>
+            <a:r>
+              <a:rPr sz="2600" b="1">
+                <a:solidFill>
+                  <a:srgbClr val="FFFFFF"/>
+                </a:solidFill>
+                <a:latin typeface="Cambria"/>
+              </a:rPr>
+              <a:t>Reloj con defecto evidente</a:t>
+            </a:r>
+          </a:p>
+        </p:txBody>
+      </p:sp>
+      <p:sp>
+        <p:nvSpPr>
+          <p:cNvPr id="5" name="TextBox 4"/>
+          <p:cNvSpPr txBox="1"/>
+          <p:nvPr/>
+        </p:nvSpPr>
+        <p:spPr>
+          <a:xfrm>
+            <a:off x="548640" y="2103120"/>
+            <a:ext cx="11064240" cy="3931920"/>
+          </a:xfrm>
+          <a:prstGeom prst="rect">
+            <a:avLst/>
+          </a:prstGeom>
+          <a:noFill/>
+        </p:spPr>
+        <p:txBody>
+          <a:bodyPr wrap="square">
+            <a:spAutoFit/>
+          </a:bodyPr>
+          <a:lstStyle/>
+          <a:p>
+            <a:r>
+              <a:rPr sz="2000" b="0">
+                <a:solidFill>
+                  <a:srgbClr val="CADCFC"/>
+                </a:solidFill>
+                <a:latin typeface="Calibri"/>
+              </a:rPr>
+              <a:t>El árbitro lo reemplaza y fija los tiempos del reloj nuevo con su mejor criterio, apoyándose en las planillas y en lo que recuerden los jugadores.</a:t>
+            </a:r>
+          </a:p>
+        </p:txBody>
+      </p:sp>
+      <p:sp>
+        <p:nvSpPr>
+          <p:cNvPr id="6" name="TextBox 5"/>
+          <p:cNvSpPr txBox="1"/>
+          <p:nvPr/>
+        </p:nvSpPr>
+        <p:spPr>
+          <a:xfrm>
+            <a:off x="548640" y="6263640"/>
+            <a:ext cx="11064240" cy="365760"/>
+          </a:xfrm>
+          <a:prstGeom prst="rect">
+            <a:avLst/>
+          </a:prstGeom>
+          <a:noFill/>
+        </p:spPr>
+        <p:txBody>
+          <a:bodyPr wrap="square">
+            <a:spAutoFit/>
+          </a:bodyPr>
+          <a:lstStyle/>
+          <a:p>
+            <a:r>
+              <a:rPr sz="1100" b="0">
+                <a:solidFill>
+                  <a:srgbClr val="9FB3C8"/>
+                </a:solidFill>
+                <a:latin typeface="Calibri"/>
+              </a:rPr>
+              <a:t>Fuente: Leyes del Ajedrez 2023 (Handbook E.I.01), art. 6.10.1</a:t>
+            </a:r>
+          </a:p>
+        </p:txBody>
+      </p:sp>
+    </p:spTree>
+  </p:cSld>
+  <p:clrMapOvr>
+    <a:masterClrMapping/>
+  </p:clrMapOvr>
+</p:sld>
+</file>
+
+<file path=ppt/slides/slide16.xml><?xml version="1.0" encoding="utf-8"?>
+<p:sld xmlns:a="http://schemas.openxmlformats.org/drawingml/2006/main" xmlns:p="http://schemas.openxmlformats.org/presentationml/2006/main" xmlns:r="http://schemas.openxmlformats.org/officeDocument/2006/relationships">
+  <p:cSld>
+    <p:spTree>
+      <p:nvGrpSpPr>
+        <p:cNvPr id="1" name=""/>
+        <p:cNvGrpSpPr/>
+        <p:nvPr/>
+      </p:nvGrpSpPr>
+      <p:grpSpPr/>
+      <p:sp>
+        <p:nvSpPr>
+          <p:cNvPr id="2" name="Rectangle 1"/>
+          <p:cNvSpPr/>
+          <p:nvPr/>
+        </p:nvSpPr>
+        <p:spPr>
+          <a:xfrm>
+            <a:off x="0" y="0"/>
+            <a:ext cx="12191695" cy="6858000"/>
+          </a:xfrm>
+          <a:prstGeom prst="rect">
+            <a:avLst/>
+          </a:prstGeom>
+          <a:solidFill>
+            <a:srgbClr val="102A43"/>
+          </a:solidFill>
+          <a:ln>
+            <a:noFill/>
+          </a:ln>
+          <a:effectLst/>
+        </p:spPr>
+        <p:style>
+          <a:lnRef idx="1">
+            <a:schemeClr val="accent1"/>
+          </a:lnRef>
+          <a:fillRef idx="3">
+            <a:schemeClr val="accent1"/>
+          </a:fillRef>
+          <a:effectRef idx="2">
+            <a:schemeClr val="accent1"/>
+          </a:effectRef>
+          <a:fontRef idx="minor">
+            <a:schemeClr val="lt1"/>
+          </a:fontRef>
+        </p:style>
+        <p:txBody>
+          <a:bodyPr rtlCol="0" anchor="ctr"/>
+          <a:lstStyle/>
+          <a:p>
+            <a:pPr algn="ctr"/>
+          </a:p>
+        </p:txBody>
+      </p:sp>
+      <p:sp>
+        <p:nvSpPr>
+          <p:cNvPr id="3" name="Oval 2"/>
+          <p:cNvSpPr/>
+          <p:nvPr/>
+        </p:nvSpPr>
+        <p:spPr>
+          <a:xfrm>
+            <a:off x="-1280160" y="-1463040"/>
+            <a:ext cx="4114800" cy="4114800"/>
+          </a:xfrm>
+          <a:prstGeom prst="ellipse">
+            <a:avLst/>
+          </a:prstGeom>
+          <a:solidFill>
+            <a:srgbClr val="0A1F33"/>
+          </a:solidFill>
+          <a:ln>
+            <a:noFill/>
+          </a:ln>
+          <a:effectLst/>
+        </p:spPr>
+        <p:style>
+          <a:lnRef idx="1">
+            <a:schemeClr val="accent1"/>
+          </a:lnRef>
+          <a:fillRef idx="3">
+            <a:schemeClr val="accent1"/>
+          </a:fillRef>
+          <a:effectRef idx="2">
+            <a:schemeClr val="accent1"/>
+          </a:effectRef>
+          <a:fontRef idx="minor">
+            <a:schemeClr val="lt1"/>
+          </a:fontRef>
+        </p:style>
+        <p:txBody>
+          <a:bodyPr rtlCol="0" anchor="ctr"/>
+          <a:lstStyle/>
+          <a:p>
+            <a:pPr algn="ctr"/>
+          </a:p>
+        </p:txBody>
+      </p:sp>
+      <p:sp>
+        <p:nvSpPr>
+          <p:cNvPr id="4" name="Oval 3"/>
+          <p:cNvSpPr/>
+          <p:nvPr/>
+        </p:nvSpPr>
+        <p:spPr>
+          <a:xfrm>
+            <a:off x="5175504" y="822960"/>
+            <a:ext cx="1828800" cy="1828800"/>
+          </a:xfrm>
+          <a:prstGeom prst="ellipse">
+            <a:avLst/>
+          </a:prstGeom>
+          <a:solidFill>
+            <a:srgbClr val="DE911D"/>
+          </a:solidFill>
+          <a:ln>
+            <a:noFill/>
+          </a:ln>
+          <a:effectLst/>
+        </p:spPr>
+        <p:style>
+          <a:lnRef idx="1">
+            <a:schemeClr val="accent1"/>
+          </a:lnRef>
+          <a:fillRef idx="3">
+            <a:schemeClr val="accent1"/>
+          </a:fillRef>
+          <a:effectRef idx="2">
+            <a:schemeClr val="accent1"/>
+          </a:effectRef>
+          <a:fontRef idx="minor">
+            <a:schemeClr val="lt1"/>
+          </a:fontRef>
+        </p:style>
+        <p:txBody>
+          <a:bodyPr rtlCol="0" anchor="ctr"/>
+          <a:lstStyle/>
+          <a:p>
+            <a:pPr algn="ctr"/>
+          </a:p>
+        </p:txBody>
+      </p:sp>
+      <p:sp>
+        <p:nvSpPr>
+          <p:cNvPr id="5" name="TextBox 4"/>
+          <p:cNvSpPr txBox="1"/>
+          <p:nvPr/>
+        </p:nvSpPr>
+        <p:spPr>
+          <a:xfrm>
+            <a:off x="5175504" y="822960"/>
+            <a:ext cx="1828800" cy="1828800"/>
+          </a:xfrm>
+          <a:prstGeom prst="rect">
+            <a:avLst/>
+          </a:prstGeom>
+          <a:noFill/>
+        </p:spPr>
+        <p:txBody>
+          <a:bodyPr wrap="square">
+            <a:spAutoFit/>
+          </a:bodyPr>
+          <a:lstStyle/>
+          <a:p>
+            <a:pPr algn="ctr"/>
+            <a:r>
+              <a:rPr sz="4400" b="1">
+                <a:solidFill>
+                  <a:srgbClr val="0A1F33"/>
+                </a:solidFill>
+                <a:latin typeface="Calibri"/>
+              </a:rPr>
+              <a:t>✔</a:t>
+            </a:r>
+          </a:p>
+        </p:txBody>
+      </p:sp>
+      <p:sp>
+        <p:nvSpPr>
+          <p:cNvPr id="6" name="TextBox 5"/>
+          <p:cNvSpPr txBox="1"/>
+          <p:nvPr/>
+        </p:nvSpPr>
+        <p:spPr>
+          <a:xfrm>
+            <a:off x="548640" y="2880360"/>
+            <a:ext cx="11064240" cy="457200"/>
+          </a:xfrm>
+          <a:prstGeom prst="rect">
+            <a:avLst/>
+          </a:prstGeom>
+          <a:noFill/>
+        </p:spPr>
+        <p:txBody>
+          <a:bodyPr wrap="square">
+            <a:spAutoFit/>
+          </a:bodyPr>
+          <a:lstStyle/>
+          <a:p>
+            <a:pPr algn="ctr"/>
+            <a:r>
+              <a:rPr sz="1400" b="1">
+                <a:solidFill>
+                  <a:srgbClr val="F0B429"/>
+                </a:solidFill>
+                <a:latin typeface="Calibri"/>
+              </a:rPr>
+              <a:t>PRÁCTICA — CONFIGURACIÓN DE UN RELOJ SEGÚN ESCENARIO</a:t>
+            </a:r>
+          </a:p>
+        </p:txBody>
+      </p:sp>
+      <p:sp>
+        <p:nvSpPr>
+          <p:cNvPr id="7" name="TextBox 6"/>
+          <p:cNvSpPr txBox="1"/>
+          <p:nvPr/>
+        </p:nvSpPr>
+        <p:spPr>
+          <a:xfrm>
+            <a:off x="1280160" y="3383280"/>
+            <a:ext cx="9601200" cy="2377440"/>
+          </a:xfrm>
+          <a:prstGeom prst="rect">
+            <a:avLst/>
+          </a:prstGeom>
+          <a:noFill/>
+        </p:spPr>
+        <p:txBody>
+          <a:bodyPr wrap="square">
+            <a:spAutoFit/>
+          </a:bodyPr>
+          <a:lstStyle/>
+          <a:p>
+            <a:pPr algn="ctr"/>
+            <a:r>
+              <a:rPr sz="2000" b="0">
+                <a:solidFill>
+                  <a:srgbClr val="FFFFFF"/>
+                </a:solidFill>
+                <a:latin typeface="Cambria"/>
+              </a:rPr>
+              <a:t>Con un simulador de reloj digital en línea, cada participante configura el control de tiempo correspondiente a tres escenarios: partida clásica, rápida y relámpago.</a:t>
+            </a:r>
+          </a:p>
+        </p:txBody>
+      </p:sp>
+      <p:sp>
+        <p:nvSpPr>
+          <p:cNvPr id="8" name="TextBox 7"/>
+          <p:cNvSpPr txBox="1"/>
+          <p:nvPr/>
+        </p:nvSpPr>
+        <p:spPr>
+          <a:xfrm>
+            <a:off x="548640" y="6263640"/>
+            <a:ext cx="11064240" cy="365760"/>
+          </a:xfrm>
+          <a:prstGeom prst="rect">
+            <a:avLst/>
+          </a:prstGeom>
+          <a:noFill/>
+        </p:spPr>
+        <p:txBody>
+          <a:bodyPr wrap="square">
+            <a:spAutoFit/>
+          </a:bodyPr>
+          <a:lstStyle/>
+          <a:p>
+            <a:pPr algn="ctr"/>
+            <a:r>
+              <a:rPr sz="1200" b="0">
+                <a:solidFill>
+                  <a:srgbClr val="9FB3C8"/>
+                </a:solidFill>
+                <a:latin typeface="Calibri"/>
+              </a:rPr>
+              <a:t>Formación Ajedrez · Sesión 5</a:t>
+            </a:r>
+          </a:p>
+        </p:txBody>
+      </p:sp>
+    </p:spTree>
+  </p:cSld>
+  <p:clrMapOvr>
+    <a:masterClrMapping/>
+  </p:clrMapOvr>
+</p:sld>
+</file>
+
+<file path=ppt/slides/slide17.xml><?xml version="1.0" encoding="utf-8"?>
+<p:sld xmlns:a="http://schemas.openxmlformats.org/drawingml/2006/main" xmlns:p="http://schemas.openxmlformats.org/presentationml/2006/main" xmlns:r="http://schemas.openxmlformats.org/officeDocument/2006/relationships">
+  <p:cSld>
+    <p:spTree>
+      <p:nvGrpSpPr>
+        <p:cNvPr id="1" name=""/>
+        <p:cNvGrpSpPr/>
+        <p:nvPr/>
+      </p:nvGrpSpPr>
+      <p:grpSpPr/>
+      <p:sp>
+        <p:nvSpPr>
+          <p:cNvPr id="2" name="Oval 1"/>
+          <p:cNvSpPr/>
+          <p:nvPr/>
+        </p:nvSpPr>
+        <p:spPr>
+          <a:xfrm>
+            <a:off x="548640" y="502920"/>
+            <a:ext cx="502920" cy="502920"/>
+          </a:xfrm>
+          <a:prstGeom prst="ellipse">
+            <a:avLst/>
+          </a:prstGeom>
+          <a:solidFill>
+            <a:srgbClr val="DE911D"/>
+          </a:solidFill>
+          <a:ln>
+            <a:noFill/>
+          </a:ln>
+          <a:effectLst/>
+        </p:spPr>
+        <p:style>
+          <a:lnRef idx="1">
+            <a:schemeClr val="accent1"/>
+          </a:lnRef>
+          <a:fillRef idx="3">
+            <a:schemeClr val="accent1"/>
+          </a:fillRef>
+          <a:effectRef idx="2">
+            <a:schemeClr val="accent1"/>
+          </a:effectRef>
+          <a:fontRef idx="minor">
+            <a:schemeClr val="lt1"/>
+          </a:fontRef>
+        </p:style>
+        <p:txBody>
+          <a:bodyPr rtlCol="0" anchor="ctr"/>
+          <a:lstStyle/>
+          <a:p>
+            <a:pPr algn="ctr"/>
+          </a:p>
+        </p:txBody>
+      </p:sp>
+      <p:sp>
+        <p:nvSpPr>
+          <p:cNvPr id="3" name="TextBox 2"/>
+          <p:cNvSpPr txBox="1"/>
+          <p:nvPr/>
+        </p:nvSpPr>
+        <p:spPr>
+          <a:xfrm>
+            <a:off x="548640" y="502920"/>
+            <a:ext cx="502920" cy="502920"/>
+          </a:xfrm>
+          <a:prstGeom prst="rect">
+            <a:avLst/>
+          </a:prstGeom>
+          <a:noFill/>
+        </p:spPr>
+        <p:txBody>
+          <a:bodyPr wrap="square">
+            <a:spAutoFit/>
+          </a:bodyPr>
+          <a:lstStyle/>
+          <a:p>
+            <a:pPr algn="ctr"/>
+            <a:r>
+              <a:rPr sz="2000" b="0">
+                <a:solidFill>
+                  <a:srgbClr val="0A1F33"/>
+                </a:solidFill>
+                <a:latin typeface="Calibri"/>
+              </a:rPr>
+              <a:t>✎</a:t>
+            </a:r>
+          </a:p>
+        </p:txBody>
+      </p:sp>
+      <p:sp>
+        <p:nvSpPr>
+          <p:cNvPr id="4" name="TextBox 3"/>
+          <p:cNvSpPr txBox="1"/>
+          <p:nvPr/>
+        </p:nvSpPr>
+        <p:spPr>
+          <a:xfrm>
+            <a:off x="1234440" y="530352"/>
+            <a:ext cx="9144000" cy="457200"/>
+          </a:xfrm>
+          <a:prstGeom prst="rect">
+            <a:avLst/>
+          </a:prstGeom>
+          <a:noFill/>
+        </p:spPr>
+        <p:txBody>
+          <a:bodyPr wrap="square">
+            <a:spAutoFit/>
+          </a:bodyPr>
+          <a:lstStyle/>
+          <a:p>
+            <a:r>
+              <a:rPr sz="1400" b="1">
+                <a:solidFill>
+                  <a:srgbClr val="DE911D"/>
+                </a:solidFill>
+                <a:latin typeface="Calibri"/>
+              </a:rPr>
+              <a:t>EJERCICIO 1 DE 5</a:t>
+            </a:r>
+          </a:p>
+        </p:txBody>
+      </p:sp>
+      <p:sp>
+        <p:nvSpPr>
+          <p:cNvPr id="5" name="Rectangle 4"/>
+          <p:cNvSpPr/>
+          <p:nvPr/>
+        </p:nvSpPr>
+        <p:spPr>
+          <a:xfrm>
+            <a:off x="548640" y="1188720"/>
+            <a:ext cx="11064240" cy="5029200"/>
+          </a:xfrm>
+          <a:prstGeom prst="rect">
+            <a:avLst/>
+          </a:prstGeom>
+          <a:solidFill>
+            <a:srgbClr val="F0F4F8"/>
+          </a:solidFill>
+          <a:ln>
+            <a:noFill/>
+          </a:ln>
+          <a:effectLst/>
+        </p:spPr>
+        <p:style>
+          <a:lnRef idx="1">
+            <a:schemeClr val="accent1"/>
+          </a:lnRef>
+          <a:fillRef idx="3">
+            <a:schemeClr val="accent1"/>
+          </a:fillRef>
+          <a:effectRef idx="2">
+            <a:schemeClr val="accent1"/>
+          </a:effectRef>
+          <a:fontRef idx="minor">
+            <a:schemeClr val="lt1"/>
+          </a:fontRef>
+        </p:style>
+        <p:txBody>
+          <a:bodyPr rtlCol="0" anchor="ctr"/>
+          <a:lstStyle/>
+          <a:p>
+            <a:pPr algn="ctr"/>
+          </a:p>
+        </p:txBody>
+      </p:sp>
+      <p:sp>
+        <p:nvSpPr>
+          <p:cNvPr id="6" name="TextBox 5"/>
+          <p:cNvSpPr txBox="1"/>
+          <p:nvPr/>
+        </p:nvSpPr>
+        <p:spPr>
+          <a:xfrm>
+            <a:off x="914400" y="1554480"/>
+            <a:ext cx="10332720" cy="4480560"/>
+          </a:xfrm>
+          <a:prstGeom prst="rect">
+            <a:avLst/>
+          </a:prstGeom>
+          <a:noFill/>
+        </p:spPr>
+        <p:txBody>
+          <a:bodyPr wrap="square">
+            <a:spAutoFit/>
+          </a:bodyPr>
+          <a:lstStyle/>
+          <a:p>
+            <a:r>
+              <a:rPr sz="2200" b="0">
+                <a:solidFill>
+                  <a:srgbClr val="0A1F33"/>
+                </a:solidFill>
+                <a:latin typeface="Calibri"/>
+              </a:rPr>
+              <a:t>Configura el reloj para una partida clásica de 90 minutos con 30 segundos de incremento desde la jugada 1. ¿Deben anotar los jugadores toda la partida?</a:t>
+            </a:r>
+          </a:p>
+        </p:txBody>
+      </p:sp>
+    </p:spTree>
+  </p:cSld>
+  <p:clrMapOvr>
+    <a:masterClrMapping/>
+  </p:clrMapOvr>
+</p:sld>
+</file>
+
+<file path=ppt/slides/slide18.xml><?xml version="1.0" encoding="utf-8"?>
+<p:sld xmlns:a="http://schemas.openxmlformats.org/drawingml/2006/main" xmlns:p="http://schemas.openxmlformats.org/presentationml/2006/main" xmlns:r="http://schemas.openxmlformats.org/officeDocument/2006/relationships">
+  <p:cSld>
+    <p:spTree>
+      <p:nvGrpSpPr>
+        <p:cNvPr id="1" name=""/>
+        <p:cNvGrpSpPr/>
+        <p:nvPr/>
+      </p:nvGrpSpPr>
+      <p:grpSpPr/>
+      <p:sp>
+        <p:nvSpPr>
+          <p:cNvPr id="2" name="Oval 1"/>
+          <p:cNvSpPr/>
+          <p:nvPr/>
+        </p:nvSpPr>
+        <p:spPr>
+          <a:xfrm>
+            <a:off x="548640" y="502920"/>
+            <a:ext cx="502920" cy="502920"/>
+          </a:xfrm>
+          <a:prstGeom prst="ellipse">
+            <a:avLst/>
+          </a:prstGeom>
+          <a:solidFill>
+            <a:srgbClr val="DE911D"/>
+          </a:solidFill>
+          <a:ln>
+            <a:noFill/>
+          </a:ln>
+          <a:effectLst/>
+        </p:spPr>
+        <p:style>
+          <a:lnRef idx="1">
+            <a:schemeClr val="accent1"/>
+          </a:lnRef>
+          <a:fillRef idx="3">
+            <a:schemeClr val="accent1"/>
+          </a:fillRef>
+          <a:effectRef idx="2">
+            <a:schemeClr val="accent1"/>
+          </a:effectRef>
+          <a:fontRef idx="minor">
+            <a:schemeClr val="lt1"/>
+          </a:fontRef>
+        </p:style>
+        <p:txBody>
+          <a:bodyPr rtlCol="0" anchor="ctr"/>
+          <a:lstStyle/>
+          <a:p>
+            <a:pPr algn="ctr"/>
+          </a:p>
+        </p:txBody>
+      </p:sp>
+      <p:sp>
+        <p:nvSpPr>
+          <p:cNvPr id="3" name="TextBox 2"/>
+          <p:cNvSpPr txBox="1"/>
+          <p:nvPr/>
+        </p:nvSpPr>
+        <p:spPr>
+          <a:xfrm>
+            <a:off x="548640" y="502920"/>
+            <a:ext cx="502920" cy="502920"/>
+          </a:xfrm>
+          <a:prstGeom prst="rect">
+            <a:avLst/>
+          </a:prstGeom>
+          <a:noFill/>
+        </p:spPr>
+        <p:txBody>
+          <a:bodyPr wrap="square">
+            <a:spAutoFit/>
+          </a:bodyPr>
+          <a:lstStyle/>
+          <a:p>
+            <a:pPr algn="ctr"/>
+            <a:r>
+              <a:rPr sz="2000" b="0">
+                <a:solidFill>
+                  <a:srgbClr val="0A1F33"/>
+                </a:solidFill>
+                <a:latin typeface="Calibri"/>
+              </a:rPr>
+              <a:t>✎</a:t>
+            </a:r>
+          </a:p>
+        </p:txBody>
+      </p:sp>
+      <p:sp>
+        <p:nvSpPr>
+          <p:cNvPr id="4" name="TextBox 3"/>
+          <p:cNvSpPr txBox="1"/>
+          <p:nvPr/>
+        </p:nvSpPr>
+        <p:spPr>
+          <a:xfrm>
+            <a:off x="1234440" y="530352"/>
+            <a:ext cx="9144000" cy="457200"/>
+          </a:xfrm>
+          <a:prstGeom prst="rect">
+            <a:avLst/>
+          </a:prstGeom>
+          <a:noFill/>
+        </p:spPr>
+        <p:txBody>
+          <a:bodyPr wrap="square">
+            <a:spAutoFit/>
+          </a:bodyPr>
+          <a:lstStyle/>
+          <a:p>
+            <a:r>
+              <a:rPr sz="1400" b="1">
+                <a:solidFill>
+                  <a:srgbClr val="DE911D"/>
+                </a:solidFill>
+                <a:latin typeface="Calibri"/>
+              </a:rPr>
+              <a:t>EJERCICIO 2 DE 5</a:t>
+            </a:r>
+          </a:p>
+        </p:txBody>
+      </p:sp>
+      <p:sp>
+        <p:nvSpPr>
+          <p:cNvPr id="5" name="Rectangle 4"/>
+          <p:cNvSpPr/>
+          <p:nvPr/>
+        </p:nvSpPr>
+        <p:spPr>
+          <a:xfrm>
+            <a:off x="548640" y="1188720"/>
+            <a:ext cx="11064240" cy="5029200"/>
+          </a:xfrm>
+          <a:prstGeom prst="rect">
+            <a:avLst/>
+          </a:prstGeom>
+          <a:solidFill>
+            <a:srgbClr val="F0F4F8"/>
+          </a:solidFill>
+          <a:ln>
+            <a:noFill/>
+          </a:ln>
+          <a:effectLst/>
+        </p:spPr>
+        <p:style>
+          <a:lnRef idx="1">
+            <a:schemeClr val="accent1"/>
+          </a:lnRef>
+          <a:fillRef idx="3">
+            <a:schemeClr val="accent1"/>
+          </a:fillRef>
+          <a:effectRef idx="2">
+            <a:schemeClr val="accent1"/>
+          </a:effectRef>
+          <a:fontRef idx="minor">
+            <a:schemeClr val="lt1"/>
+          </a:fontRef>
+        </p:style>
+        <p:txBody>
+          <a:bodyPr rtlCol="0" anchor="ctr"/>
+          <a:lstStyle/>
+          <a:p>
+            <a:pPr algn="ctr"/>
+          </a:p>
+        </p:txBody>
+      </p:sp>
+      <p:sp>
+        <p:nvSpPr>
+          <p:cNvPr id="6" name="TextBox 5"/>
+          <p:cNvSpPr txBox="1"/>
+          <p:nvPr/>
+        </p:nvSpPr>
+        <p:spPr>
+          <a:xfrm>
+            <a:off x="914400" y="1554480"/>
+            <a:ext cx="10332720" cy="4480560"/>
+          </a:xfrm>
+          <a:prstGeom prst="rect">
+            <a:avLst/>
+          </a:prstGeom>
+          <a:noFill/>
+        </p:spPr>
+        <p:txBody>
+          <a:bodyPr wrap="square">
+            <a:spAutoFit/>
+          </a:bodyPr>
+          <a:lstStyle/>
+          <a:p>
+            <a:r>
+              <a:rPr sz="2200" b="0">
+                <a:solidFill>
+                  <a:srgbClr val="0A1F33"/>
+                </a:solidFill>
+                <a:latin typeface="Calibri"/>
+              </a:rPr>
+              <a:t>Configura el reloj para rápidas a 15 minutos más 10 segundos. ¿Qué ritmo es según la fórmula?</a:t>
+            </a:r>
+          </a:p>
+        </p:txBody>
+      </p:sp>
+    </p:spTree>
+  </p:cSld>
+  <p:clrMapOvr>
+    <a:masterClrMapping/>
+  </p:clrMapOvr>
+</p:sld>
+</file>
+
+<file path=ppt/slides/slide19.xml><?xml version="1.0" encoding="utf-8"?>
+<p:sld xmlns:a="http://schemas.openxmlformats.org/drawingml/2006/main" xmlns:p="http://schemas.openxmlformats.org/presentationml/2006/main" xmlns:r="http://schemas.openxmlformats.org/officeDocument/2006/relationships">
+  <p:cSld>
+    <p:spTree>
+      <p:nvGrpSpPr>
+        <p:cNvPr id="1" name=""/>
+        <p:cNvGrpSpPr/>
+        <p:nvPr/>
+      </p:nvGrpSpPr>
+      <p:grpSpPr/>
+      <p:sp>
+        <p:nvSpPr>
+          <p:cNvPr id="2" name="Oval 1"/>
+          <p:cNvSpPr/>
+          <p:nvPr/>
+        </p:nvSpPr>
+        <p:spPr>
+          <a:xfrm>
+            <a:off x="548640" y="502920"/>
+            <a:ext cx="502920" cy="502920"/>
+          </a:xfrm>
+          <a:prstGeom prst="ellipse">
+            <a:avLst/>
+          </a:prstGeom>
+          <a:solidFill>
+            <a:srgbClr val="DE911D"/>
+          </a:solidFill>
+          <a:ln>
+            <a:noFill/>
+          </a:ln>
+          <a:effectLst/>
+        </p:spPr>
+        <p:style>
+          <a:lnRef idx="1">
+            <a:schemeClr val="accent1"/>
+          </a:lnRef>
+          <a:fillRef idx="3">
+            <a:schemeClr val="accent1"/>
+          </a:fillRef>
+          <a:effectRef idx="2">
+            <a:schemeClr val="accent1"/>
+          </a:effectRef>
+          <a:fontRef idx="minor">
+            <a:schemeClr val="lt1"/>
+          </a:fontRef>
+        </p:style>
+        <p:txBody>
+          <a:bodyPr rtlCol="0" anchor="ctr"/>
+          <a:lstStyle/>
+          <a:p>
+            <a:pPr algn="ctr"/>
+          </a:p>
+        </p:txBody>
+      </p:sp>
+      <p:sp>
+        <p:nvSpPr>
+          <p:cNvPr id="3" name="TextBox 2"/>
+          <p:cNvSpPr txBox="1"/>
+          <p:nvPr/>
+        </p:nvSpPr>
+        <p:spPr>
+          <a:xfrm>
+            <a:off x="548640" y="502920"/>
+            <a:ext cx="502920" cy="502920"/>
+          </a:xfrm>
+          <a:prstGeom prst="rect">
+            <a:avLst/>
+          </a:prstGeom>
+          <a:noFill/>
+        </p:spPr>
+        <p:txBody>
+          <a:bodyPr wrap="square">
+            <a:spAutoFit/>
+          </a:bodyPr>
+          <a:lstStyle/>
+          <a:p>
+            <a:pPr algn="ctr"/>
+            <a:r>
+              <a:rPr sz="2000" b="0">
+                <a:solidFill>
+                  <a:srgbClr val="0A1F33"/>
+                </a:solidFill>
+                <a:latin typeface="Calibri"/>
+              </a:rPr>
+              <a:t>✎</a:t>
+            </a:r>
+          </a:p>
+        </p:txBody>
+      </p:sp>
+      <p:sp>
+        <p:nvSpPr>
+          <p:cNvPr id="4" name="TextBox 3"/>
+          <p:cNvSpPr txBox="1"/>
+          <p:nvPr/>
+        </p:nvSpPr>
+        <p:spPr>
+          <a:xfrm>
+            <a:off x="1234440" y="530352"/>
+            <a:ext cx="9144000" cy="457200"/>
+          </a:xfrm>
+          <a:prstGeom prst="rect">
+            <a:avLst/>
+          </a:prstGeom>
+          <a:noFill/>
+        </p:spPr>
+        <p:txBody>
+          <a:bodyPr wrap="square">
+            <a:spAutoFit/>
+          </a:bodyPr>
+          <a:lstStyle/>
+          <a:p>
+            <a:r>
+              <a:rPr sz="1400" b="1">
+                <a:solidFill>
+                  <a:srgbClr val="DE911D"/>
+                </a:solidFill>
+                <a:latin typeface="Calibri"/>
+              </a:rPr>
+              <a:t>EJERCICIO 3 DE 5</a:t>
+            </a:r>
+          </a:p>
+        </p:txBody>
+      </p:sp>
+      <p:sp>
+        <p:nvSpPr>
+          <p:cNvPr id="5" name="Rectangle 4"/>
+          <p:cNvSpPr/>
+          <p:nvPr/>
+        </p:nvSpPr>
+        <p:spPr>
+          <a:xfrm>
+            <a:off x="548640" y="1188720"/>
+            <a:ext cx="11064240" cy="5029200"/>
+          </a:xfrm>
+          <a:prstGeom prst="rect">
+            <a:avLst/>
+          </a:prstGeom>
+          <a:solidFill>
+            <a:srgbClr val="F0F4F8"/>
+          </a:solidFill>
+          <a:ln>
+            <a:noFill/>
+          </a:ln>
+          <a:effectLst/>
+        </p:spPr>
+        <p:style>
+          <a:lnRef idx="1">
+            <a:schemeClr val="accent1"/>
+          </a:lnRef>
+          <a:fillRef idx="3">
+            <a:schemeClr val="accent1"/>
+          </a:fillRef>
+          <a:effectRef idx="2">
+            <a:schemeClr val="accent1"/>
+          </a:effectRef>
+          <a:fontRef idx="minor">
+            <a:schemeClr val="lt1"/>
+          </a:fontRef>
+        </p:style>
+        <p:txBody>
+          <a:bodyPr rtlCol="0" anchor="ctr"/>
+          <a:lstStyle/>
+          <a:p>
+            <a:pPr algn="ctr"/>
+          </a:p>
+        </p:txBody>
+      </p:sp>
+      <p:sp>
+        <p:nvSpPr>
+          <p:cNvPr id="6" name="TextBox 5"/>
+          <p:cNvSpPr txBox="1"/>
+          <p:nvPr/>
+        </p:nvSpPr>
+        <p:spPr>
+          <a:xfrm>
+            <a:off x="914400" y="1554480"/>
+            <a:ext cx="10332720" cy="4480560"/>
+          </a:xfrm>
+          <a:prstGeom prst="rect">
+            <a:avLst/>
+          </a:prstGeom>
+          <a:noFill/>
+        </p:spPr>
+        <p:txBody>
+          <a:bodyPr wrap="square">
+            <a:spAutoFit/>
+          </a:bodyPr>
+          <a:lstStyle/>
+          <a:p>
+            <a:r>
+              <a:rPr sz="2200" b="0">
+                <a:solidFill>
+                  <a:srgbClr val="0A1F33"/>
+                </a:solidFill>
+                <a:latin typeface="Calibri"/>
+              </a:rPr>
+              <a:t>Configura el reloj para relámpago a 3 minutos más 2 segundos. ¿Qué ritmo es?</a:t>
+            </a:r>
+          </a:p>
+        </p:txBody>
+      </p:sp>
+    </p:spTree>
+  </p:cSld>
+  <p:clrMapOvr>
+    <a:masterClrMapping/>
+  </p:clrMapOvr>
+</p:sld>
+</file>
+
 <file path=ppt/slides/slide2.xml><?xml version="1.0" encoding="utf-8"?>
 <p:sld xmlns:a="http://schemas.openxmlformats.org/drawingml/2006/main" xmlns:p="http://schemas.openxmlformats.org/presentationml/2006/main" xmlns:r="http://schemas.openxmlformats.org/officeDocument/2006/relationships">
   <p:cSld>
@@ -3565,7 +5823,7 @@
                 </a:solidFill>
                 <a:latin typeface="Calibri"/>
               </a:rPr>
-              <a:t>⚖</a:t>
+              <a:t>◎</a:t>
             </a:r>
           </a:p>
         </p:txBody>
@@ -3579,7 +5837,7 @@
         <p:spPr>
           <a:xfrm>
             <a:off x="1234440" y="530352"/>
-            <a:ext cx="7315200" cy="457200"/>
+            <a:ext cx="9144000" cy="457200"/>
           </a:xfrm>
           <a:prstGeom prst="rect">
             <a:avLst/>
@@ -3599,7 +5857,7 @@
                 </a:solidFill>
                 <a:latin typeface="Calibri"/>
               </a:rPr>
-              <a:t>CONTENIDO DE LA SESIÓN</a:t>
+              <a:t>OBJETIVOS DE LA SESIÓN</a:t>
             </a:r>
           </a:p>
         </p:txBody>
@@ -3690,8 +5948,8 @@
         </p:nvSpPr>
         <p:spPr>
           <a:xfrm>
-            <a:off x="1005840" y="2331720"/>
-            <a:ext cx="10241280" cy="3566160"/>
+            <a:off x="914400" y="2194560"/>
+            <a:ext cx="10332720" cy="3931920"/>
           </a:xfrm>
           <a:prstGeom prst="rect">
             <a:avLst/>
@@ -3704,14 +5962,977 @@
           </a:bodyPr>
           <a:lstStyle/>
           <a:p>
-            <a:r>
-              <a:rPr sz="1600" b="0">
+            <a:pPr>
+              <a:spcAft>
+                <a:spcPts val="800"/>
+              </a:spcAft>
+            </a:pPr>
+            <a:r>
+              <a:rPr sz="1800">
                 <a:solidFill>
                   <a:srgbClr val="334E68"/>
                 </a:solidFill>
                 <a:latin typeface="Calibri"/>
               </a:rPr>
-              <a:t>Tipos de reloj y sistemas de control de tiempo (incrementos, aplazamientos, tiempo Fischer).</a:t>
+              <a:t>•  Aplicar las reglas del art. 6 sobre el uso del reloj durante la partida.</a:t>
+            </a:r>
+          </a:p>
+          <a:p>
+            <a:pPr>
+              <a:spcAft>
+                <a:spcPts val="800"/>
+              </a:spcAft>
+            </a:pPr>
+            <a:r>
+              <a:rPr sz="1800">
+                <a:solidFill>
+                  <a:srgbClr val="334E68"/>
+                </a:solidFill>
+                <a:latin typeface="Calibri"/>
+              </a:rPr>
+              <a:t>•  Distinguir controles sin incremento, con incremento (Fischer), con demora y por períodos.</a:t>
+            </a:r>
+          </a:p>
+          <a:p>
+            <a:pPr>
+              <a:spcAft>
+                <a:spcPts val="800"/>
+              </a:spcAft>
+            </a:pPr>
+            <a:r>
+              <a:rPr sz="1800">
+                <a:solidFill>
+                  <a:srgbClr val="334E68"/>
+                </a:solidFill>
+                <a:latin typeface="Calibri"/>
+              </a:rPr>
+              <a:t>•  Configurar el reloj para partidas clásicas, rápidas y relámpago.</a:t>
+            </a:r>
+          </a:p>
+          <a:p>
+            <a:pPr>
+              <a:spcAft>
+                <a:spcPts val="800"/>
+              </a:spcAft>
+            </a:pPr>
+            <a:r>
+              <a:rPr sz="1800">
+                <a:solidFill>
+                  <a:srgbClr val="334E68"/>
+                </a:solidFill>
+                <a:latin typeface="Calibri"/>
+              </a:rPr>
+              <a:t>•  Resolver incidencias de tiempo: caída de bandera, incomparecencia y reloj defectuoso.</a:t>
+            </a:r>
+          </a:p>
+        </p:txBody>
+      </p:sp>
+    </p:spTree>
+  </p:cSld>
+  <p:clrMapOvr>
+    <a:masterClrMapping/>
+  </p:clrMapOvr>
+</p:sld>
+</file>
+
+<file path=ppt/slides/slide20.xml><?xml version="1.0" encoding="utf-8"?>
+<p:sld xmlns:a="http://schemas.openxmlformats.org/drawingml/2006/main" xmlns:p="http://schemas.openxmlformats.org/presentationml/2006/main" xmlns:r="http://schemas.openxmlformats.org/officeDocument/2006/relationships">
+  <p:cSld>
+    <p:spTree>
+      <p:nvGrpSpPr>
+        <p:cNvPr id="1" name=""/>
+        <p:cNvGrpSpPr/>
+        <p:nvPr/>
+      </p:nvGrpSpPr>
+      <p:grpSpPr/>
+      <p:sp>
+        <p:nvSpPr>
+          <p:cNvPr id="2" name="Oval 1"/>
+          <p:cNvSpPr/>
+          <p:nvPr/>
+        </p:nvSpPr>
+        <p:spPr>
+          <a:xfrm>
+            <a:off x="548640" y="502920"/>
+            <a:ext cx="502920" cy="502920"/>
+          </a:xfrm>
+          <a:prstGeom prst="ellipse">
+            <a:avLst/>
+          </a:prstGeom>
+          <a:solidFill>
+            <a:srgbClr val="DE911D"/>
+          </a:solidFill>
+          <a:ln>
+            <a:noFill/>
+          </a:ln>
+          <a:effectLst/>
+        </p:spPr>
+        <p:style>
+          <a:lnRef idx="1">
+            <a:schemeClr val="accent1"/>
+          </a:lnRef>
+          <a:fillRef idx="3">
+            <a:schemeClr val="accent1"/>
+          </a:fillRef>
+          <a:effectRef idx="2">
+            <a:schemeClr val="accent1"/>
+          </a:effectRef>
+          <a:fontRef idx="minor">
+            <a:schemeClr val="lt1"/>
+          </a:fontRef>
+        </p:style>
+        <p:txBody>
+          <a:bodyPr rtlCol="0" anchor="ctr"/>
+          <a:lstStyle/>
+          <a:p>
+            <a:pPr algn="ctr"/>
+          </a:p>
+        </p:txBody>
+      </p:sp>
+      <p:sp>
+        <p:nvSpPr>
+          <p:cNvPr id="3" name="TextBox 2"/>
+          <p:cNvSpPr txBox="1"/>
+          <p:nvPr/>
+        </p:nvSpPr>
+        <p:spPr>
+          <a:xfrm>
+            <a:off x="548640" y="502920"/>
+            <a:ext cx="502920" cy="502920"/>
+          </a:xfrm>
+          <a:prstGeom prst="rect">
+            <a:avLst/>
+          </a:prstGeom>
+          <a:noFill/>
+        </p:spPr>
+        <p:txBody>
+          <a:bodyPr wrap="square">
+            <a:spAutoFit/>
+          </a:bodyPr>
+          <a:lstStyle/>
+          <a:p>
+            <a:pPr algn="ctr"/>
+            <a:r>
+              <a:rPr sz="2000" b="0">
+                <a:solidFill>
+                  <a:srgbClr val="0A1F33"/>
+                </a:solidFill>
+                <a:latin typeface="Calibri"/>
+              </a:rPr>
+              <a:t>✎</a:t>
+            </a:r>
+          </a:p>
+        </p:txBody>
+      </p:sp>
+      <p:sp>
+        <p:nvSpPr>
+          <p:cNvPr id="4" name="TextBox 3"/>
+          <p:cNvSpPr txBox="1"/>
+          <p:nvPr/>
+        </p:nvSpPr>
+        <p:spPr>
+          <a:xfrm>
+            <a:off x="1234440" y="530352"/>
+            <a:ext cx="9144000" cy="457200"/>
+          </a:xfrm>
+          <a:prstGeom prst="rect">
+            <a:avLst/>
+          </a:prstGeom>
+          <a:noFill/>
+        </p:spPr>
+        <p:txBody>
+          <a:bodyPr wrap="square">
+            <a:spAutoFit/>
+          </a:bodyPr>
+          <a:lstStyle/>
+          <a:p>
+            <a:r>
+              <a:rPr sz="1400" b="1">
+                <a:solidFill>
+                  <a:srgbClr val="DE911D"/>
+                </a:solidFill>
+                <a:latin typeface="Calibri"/>
+              </a:rPr>
+              <a:t>EJERCICIO 4 DE 5</a:t>
+            </a:r>
+          </a:p>
+        </p:txBody>
+      </p:sp>
+      <p:sp>
+        <p:nvSpPr>
+          <p:cNvPr id="5" name="Rectangle 4"/>
+          <p:cNvSpPr/>
+          <p:nvPr/>
+        </p:nvSpPr>
+        <p:spPr>
+          <a:xfrm>
+            <a:off x="548640" y="1188720"/>
+            <a:ext cx="11064240" cy="5029200"/>
+          </a:xfrm>
+          <a:prstGeom prst="rect">
+            <a:avLst/>
+          </a:prstGeom>
+          <a:solidFill>
+            <a:srgbClr val="F0F4F8"/>
+          </a:solidFill>
+          <a:ln>
+            <a:noFill/>
+          </a:ln>
+          <a:effectLst/>
+        </p:spPr>
+        <p:style>
+          <a:lnRef idx="1">
+            <a:schemeClr val="accent1"/>
+          </a:lnRef>
+          <a:fillRef idx="3">
+            <a:schemeClr val="accent1"/>
+          </a:fillRef>
+          <a:effectRef idx="2">
+            <a:schemeClr val="accent1"/>
+          </a:effectRef>
+          <a:fontRef idx="minor">
+            <a:schemeClr val="lt1"/>
+          </a:fontRef>
+        </p:style>
+        <p:txBody>
+          <a:bodyPr rtlCol="0" anchor="ctr"/>
+          <a:lstStyle/>
+          <a:p>
+            <a:pPr algn="ctr"/>
+          </a:p>
+        </p:txBody>
+      </p:sp>
+      <p:sp>
+        <p:nvSpPr>
+          <p:cNvPr id="6" name="TextBox 5"/>
+          <p:cNvSpPr txBox="1"/>
+          <p:nvPr/>
+        </p:nvSpPr>
+        <p:spPr>
+          <a:xfrm>
+            <a:off x="914400" y="1554480"/>
+            <a:ext cx="10332720" cy="4480560"/>
+          </a:xfrm>
+          <a:prstGeom prst="rect">
+            <a:avLst/>
+          </a:prstGeom>
+          <a:noFill/>
+        </p:spPr>
+        <p:txBody>
+          <a:bodyPr wrap="square">
+            <a:spAutoFit/>
+          </a:bodyPr>
+          <a:lstStyle/>
+          <a:p>
+            <a:r>
+              <a:rPr sz="2200" b="0">
+                <a:solidFill>
+                  <a:srgbClr val="0A1F33"/>
+                </a:solidFill>
+                <a:latin typeface="Calibri"/>
+              </a:rPr>
+              <a:t>Cae la bandera de un jugador. Su rival solo tiene el rey. ¿Resultado?</a:t>
+            </a:r>
+          </a:p>
+        </p:txBody>
+      </p:sp>
+    </p:spTree>
+  </p:cSld>
+  <p:clrMapOvr>
+    <a:masterClrMapping/>
+  </p:clrMapOvr>
+</p:sld>
+</file>
+
+<file path=ppt/slides/slide21.xml><?xml version="1.0" encoding="utf-8"?>
+<p:sld xmlns:a="http://schemas.openxmlformats.org/drawingml/2006/main" xmlns:p="http://schemas.openxmlformats.org/presentationml/2006/main" xmlns:r="http://schemas.openxmlformats.org/officeDocument/2006/relationships">
+  <p:cSld>
+    <p:spTree>
+      <p:nvGrpSpPr>
+        <p:cNvPr id="1" name=""/>
+        <p:cNvGrpSpPr/>
+        <p:nvPr/>
+      </p:nvGrpSpPr>
+      <p:grpSpPr/>
+      <p:sp>
+        <p:nvSpPr>
+          <p:cNvPr id="2" name="Oval 1"/>
+          <p:cNvSpPr/>
+          <p:nvPr/>
+        </p:nvSpPr>
+        <p:spPr>
+          <a:xfrm>
+            <a:off x="548640" y="502920"/>
+            <a:ext cx="502920" cy="502920"/>
+          </a:xfrm>
+          <a:prstGeom prst="ellipse">
+            <a:avLst/>
+          </a:prstGeom>
+          <a:solidFill>
+            <a:srgbClr val="DE911D"/>
+          </a:solidFill>
+          <a:ln>
+            <a:noFill/>
+          </a:ln>
+          <a:effectLst/>
+        </p:spPr>
+        <p:style>
+          <a:lnRef idx="1">
+            <a:schemeClr val="accent1"/>
+          </a:lnRef>
+          <a:fillRef idx="3">
+            <a:schemeClr val="accent1"/>
+          </a:fillRef>
+          <a:effectRef idx="2">
+            <a:schemeClr val="accent1"/>
+          </a:effectRef>
+          <a:fontRef idx="minor">
+            <a:schemeClr val="lt1"/>
+          </a:fontRef>
+        </p:style>
+        <p:txBody>
+          <a:bodyPr rtlCol="0" anchor="ctr"/>
+          <a:lstStyle/>
+          <a:p>
+            <a:pPr algn="ctr"/>
+          </a:p>
+        </p:txBody>
+      </p:sp>
+      <p:sp>
+        <p:nvSpPr>
+          <p:cNvPr id="3" name="TextBox 2"/>
+          <p:cNvSpPr txBox="1"/>
+          <p:nvPr/>
+        </p:nvSpPr>
+        <p:spPr>
+          <a:xfrm>
+            <a:off x="548640" y="502920"/>
+            <a:ext cx="502920" cy="502920"/>
+          </a:xfrm>
+          <a:prstGeom prst="rect">
+            <a:avLst/>
+          </a:prstGeom>
+          <a:noFill/>
+        </p:spPr>
+        <p:txBody>
+          <a:bodyPr wrap="square">
+            <a:spAutoFit/>
+          </a:bodyPr>
+          <a:lstStyle/>
+          <a:p>
+            <a:pPr algn="ctr"/>
+            <a:r>
+              <a:rPr sz="2000" b="0">
+                <a:solidFill>
+                  <a:srgbClr val="0A1F33"/>
+                </a:solidFill>
+                <a:latin typeface="Calibri"/>
+              </a:rPr>
+              <a:t>✎</a:t>
+            </a:r>
+          </a:p>
+        </p:txBody>
+      </p:sp>
+      <p:sp>
+        <p:nvSpPr>
+          <p:cNvPr id="4" name="TextBox 3"/>
+          <p:cNvSpPr txBox="1"/>
+          <p:nvPr/>
+        </p:nvSpPr>
+        <p:spPr>
+          <a:xfrm>
+            <a:off x="1234440" y="530352"/>
+            <a:ext cx="9144000" cy="457200"/>
+          </a:xfrm>
+          <a:prstGeom prst="rect">
+            <a:avLst/>
+          </a:prstGeom>
+          <a:noFill/>
+        </p:spPr>
+        <p:txBody>
+          <a:bodyPr wrap="square">
+            <a:spAutoFit/>
+          </a:bodyPr>
+          <a:lstStyle/>
+          <a:p>
+            <a:r>
+              <a:rPr sz="1400" b="1">
+                <a:solidFill>
+                  <a:srgbClr val="DE911D"/>
+                </a:solidFill>
+                <a:latin typeface="Calibri"/>
+              </a:rPr>
+              <a:t>EJERCICIO 5 DE 5</a:t>
+            </a:r>
+          </a:p>
+        </p:txBody>
+      </p:sp>
+      <p:sp>
+        <p:nvSpPr>
+          <p:cNvPr id="5" name="Rectangle 4"/>
+          <p:cNvSpPr/>
+          <p:nvPr/>
+        </p:nvSpPr>
+        <p:spPr>
+          <a:xfrm>
+            <a:off x="548640" y="1188720"/>
+            <a:ext cx="11064240" cy="5029200"/>
+          </a:xfrm>
+          <a:prstGeom prst="rect">
+            <a:avLst/>
+          </a:prstGeom>
+          <a:solidFill>
+            <a:srgbClr val="F0F4F8"/>
+          </a:solidFill>
+          <a:ln>
+            <a:noFill/>
+          </a:ln>
+          <a:effectLst/>
+        </p:spPr>
+        <p:style>
+          <a:lnRef idx="1">
+            <a:schemeClr val="accent1"/>
+          </a:lnRef>
+          <a:fillRef idx="3">
+            <a:schemeClr val="accent1"/>
+          </a:fillRef>
+          <a:effectRef idx="2">
+            <a:schemeClr val="accent1"/>
+          </a:effectRef>
+          <a:fontRef idx="minor">
+            <a:schemeClr val="lt1"/>
+          </a:fontRef>
+        </p:style>
+        <p:txBody>
+          <a:bodyPr rtlCol="0" anchor="ctr"/>
+          <a:lstStyle/>
+          <a:p>
+            <a:pPr algn="ctr"/>
+          </a:p>
+        </p:txBody>
+      </p:sp>
+      <p:sp>
+        <p:nvSpPr>
+          <p:cNvPr id="6" name="TextBox 5"/>
+          <p:cNvSpPr txBox="1"/>
+          <p:nvPr/>
+        </p:nvSpPr>
+        <p:spPr>
+          <a:xfrm>
+            <a:off x="914400" y="1554480"/>
+            <a:ext cx="10332720" cy="4480560"/>
+          </a:xfrm>
+          <a:prstGeom prst="rect">
+            <a:avLst/>
+          </a:prstGeom>
+          <a:noFill/>
+        </p:spPr>
+        <p:txBody>
+          <a:bodyPr wrap="square">
+            <a:spAutoFit/>
+          </a:bodyPr>
+          <a:lstStyle/>
+          <a:p>
+            <a:r>
+              <a:rPr sz="2200" b="0">
+                <a:solidFill>
+                  <a:srgbClr val="0A1F33"/>
+                </a:solidFill>
+                <a:latin typeface="Calibri"/>
+              </a:rPr>
+              <a:t>El reglamento no dice nada sobre la tolerancia. Un jugador llega 3 minutos tarde. ¿Qué pasa?</a:t>
+            </a:r>
+          </a:p>
+        </p:txBody>
+      </p:sp>
+    </p:spTree>
+  </p:cSld>
+  <p:clrMapOvr>
+    <a:masterClrMapping/>
+  </p:clrMapOvr>
+</p:sld>
+</file>
+
+<file path=ppt/slides/slide22.xml><?xml version="1.0" encoding="utf-8"?>
+<p:sld xmlns:a="http://schemas.openxmlformats.org/drawingml/2006/main" xmlns:p="http://schemas.openxmlformats.org/presentationml/2006/main" xmlns:r="http://schemas.openxmlformats.org/officeDocument/2006/relationships">
+  <p:cSld>
+    <p:spTree>
+      <p:nvGrpSpPr>
+        <p:cNvPr id="1" name=""/>
+        <p:cNvGrpSpPr/>
+        <p:nvPr/>
+      </p:nvGrpSpPr>
+      <p:grpSpPr/>
+      <p:sp>
+        <p:nvSpPr>
+          <p:cNvPr id="2" name="Oval 1"/>
+          <p:cNvSpPr/>
+          <p:nvPr/>
+        </p:nvSpPr>
+        <p:spPr>
+          <a:xfrm>
+            <a:off x="548640" y="502920"/>
+            <a:ext cx="502920" cy="502920"/>
+          </a:xfrm>
+          <a:prstGeom prst="ellipse">
+            <a:avLst/>
+          </a:prstGeom>
+          <a:solidFill>
+            <a:srgbClr val="DE911D"/>
+          </a:solidFill>
+          <a:ln>
+            <a:noFill/>
+          </a:ln>
+          <a:effectLst/>
+        </p:spPr>
+        <p:style>
+          <a:lnRef idx="1">
+            <a:schemeClr val="accent1"/>
+          </a:lnRef>
+          <a:fillRef idx="3">
+            <a:schemeClr val="accent1"/>
+          </a:fillRef>
+          <a:effectRef idx="2">
+            <a:schemeClr val="accent1"/>
+          </a:effectRef>
+          <a:fontRef idx="minor">
+            <a:schemeClr val="lt1"/>
+          </a:fontRef>
+        </p:style>
+        <p:txBody>
+          <a:bodyPr rtlCol="0" anchor="ctr"/>
+          <a:lstStyle/>
+          <a:p>
+            <a:pPr algn="ctr"/>
+          </a:p>
+        </p:txBody>
+      </p:sp>
+      <p:sp>
+        <p:nvSpPr>
+          <p:cNvPr id="3" name="TextBox 2"/>
+          <p:cNvSpPr txBox="1"/>
+          <p:nvPr/>
+        </p:nvSpPr>
+        <p:spPr>
+          <a:xfrm>
+            <a:off x="548640" y="502920"/>
+            <a:ext cx="502920" cy="502920"/>
+          </a:xfrm>
+          <a:prstGeom prst="rect">
+            <a:avLst/>
+          </a:prstGeom>
+          <a:noFill/>
+        </p:spPr>
+        <p:txBody>
+          <a:bodyPr wrap="square">
+            <a:spAutoFit/>
+          </a:bodyPr>
+          <a:lstStyle/>
+          <a:p>
+            <a:pPr algn="ctr"/>
+            <a:r>
+              <a:rPr sz="2000" b="0">
+                <a:solidFill>
+                  <a:srgbClr val="0A1F33"/>
+                </a:solidFill>
+                <a:latin typeface="Calibri"/>
+              </a:rPr>
+              <a:t>?</a:t>
+            </a:r>
+          </a:p>
+        </p:txBody>
+      </p:sp>
+      <p:sp>
+        <p:nvSpPr>
+          <p:cNvPr id="4" name="TextBox 3"/>
+          <p:cNvSpPr txBox="1"/>
+          <p:nvPr/>
+        </p:nvSpPr>
+        <p:spPr>
+          <a:xfrm>
+            <a:off x="1234440" y="530352"/>
+            <a:ext cx="9144000" cy="457200"/>
+          </a:xfrm>
+          <a:prstGeom prst="rect">
+            <a:avLst/>
+          </a:prstGeom>
+          <a:noFill/>
+        </p:spPr>
+        <p:txBody>
+          <a:bodyPr wrap="square">
+            <a:spAutoFit/>
+          </a:bodyPr>
+          <a:lstStyle/>
+          <a:p>
+            <a:r>
+              <a:rPr sz="1400" b="1">
+                <a:solidFill>
+                  <a:srgbClr val="DE911D"/>
+                </a:solidFill>
+                <a:latin typeface="Calibri"/>
+              </a:rPr>
+              <a:t>QUIZ DE LA SESIÓN</a:t>
+            </a:r>
+          </a:p>
+        </p:txBody>
+      </p:sp>
+      <p:sp>
+        <p:nvSpPr>
+          <p:cNvPr id="5" name="Rectangle 4"/>
+          <p:cNvSpPr/>
+          <p:nvPr/>
+        </p:nvSpPr>
+        <p:spPr>
+          <a:xfrm>
+            <a:off x="548640" y="1188720"/>
+            <a:ext cx="11064240" cy="5029200"/>
+          </a:xfrm>
+          <a:prstGeom prst="rect">
+            <a:avLst/>
+          </a:prstGeom>
+          <a:solidFill>
+            <a:srgbClr val="F0F4F8"/>
+          </a:solidFill>
+          <a:ln>
+            <a:noFill/>
+          </a:ln>
+          <a:effectLst/>
+        </p:spPr>
+        <p:style>
+          <a:lnRef idx="1">
+            <a:schemeClr val="accent1"/>
+          </a:lnRef>
+          <a:fillRef idx="3">
+            <a:schemeClr val="accent1"/>
+          </a:fillRef>
+          <a:effectRef idx="2">
+            <a:schemeClr val="accent1"/>
+          </a:effectRef>
+          <a:fontRef idx="minor">
+            <a:schemeClr val="lt1"/>
+          </a:fontRef>
+        </p:style>
+        <p:txBody>
+          <a:bodyPr rtlCol="0" anchor="ctr"/>
+          <a:lstStyle/>
+          <a:p>
+            <a:pPr algn="ctr"/>
+          </a:p>
+        </p:txBody>
+      </p:sp>
+      <p:sp>
+        <p:nvSpPr>
+          <p:cNvPr id="6" name="TextBox 5"/>
+          <p:cNvSpPr txBox="1"/>
+          <p:nvPr/>
+        </p:nvSpPr>
+        <p:spPr>
+          <a:xfrm>
+            <a:off x="914400" y="1371600"/>
+            <a:ext cx="10332720" cy="4754880"/>
+          </a:xfrm>
+          <a:prstGeom prst="rect">
+            <a:avLst/>
+          </a:prstGeom>
+          <a:noFill/>
+        </p:spPr>
+        <p:txBody>
+          <a:bodyPr wrap="square">
+            <a:spAutoFit/>
+          </a:bodyPr>
+          <a:lstStyle/>
+          <a:p>
+            <a:pPr>
+              <a:spcAft>
+                <a:spcPts val="600"/>
+              </a:spcAft>
+            </a:pPr>
+            <a:r>
+              <a:rPr sz="1400">
+                <a:solidFill>
+                  <a:srgbClr val="334E68"/>
+                </a:solidFill>
+                <a:latin typeface="Calibri"/>
+              </a:rPr>
+              <a:t>1. ¿Qué es el incremento o «tiempo Fischer» en el reloj de ajedrez?</a:t>
+            </a:r>
+          </a:p>
+          <a:p>
+            <a:pPr>
+              <a:spcAft>
+                <a:spcPts val="600"/>
+              </a:spcAft>
+            </a:pPr>
+            <a:r>
+              <a:rPr sz="1400">
+                <a:solidFill>
+                  <a:srgbClr val="334E68"/>
+                </a:solidFill>
+                <a:latin typeface="Calibri"/>
+              </a:rPr>
+              <a:t>2. Si a un jugador se le agota el tiempo, ¿qué debe verificar primero la persona árbitra?</a:t>
+            </a:r>
+          </a:p>
+          <a:p>
+            <a:pPr>
+              <a:spcAft>
+                <a:spcPts val="600"/>
+              </a:spcAft>
+            </a:pPr>
+            <a:r>
+              <a:rPr sz="1400">
+                <a:solidFill>
+                  <a:srgbClr val="334E68"/>
+                </a:solidFill>
+                <a:latin typeface="Calibri"/>
+              </a:rPr>
+              <a:t>3. ¿Qué reloj se pone en marcha al empezar la ronda?</a:t>
+            </a:r>
+          </a:p>
+          <a:p>
+            <a:pPr>
+              <a:spcAft>
+                <a:spcPts val="600"/>
+              </a:spcAft>
+            </a:pPr>
+            <a:r>
+              <a:rPr sz="1400">
+                <a:solidFill>
+                  <a:srgbClr val="334E68"/>
+                </a:solidFill>
+                <a:latin typeface="Calibri"/>
+              </a:rPr>
+              <a:t>4. ¿Con qué mano se presiona el reloj?</a:t>
+            </a:r>
+          </a:p>
+          <a:p>
+            <a:pPr>
+              <a:spcAft>
+                <a:spcPts val="600"/>
+              </a:spcAft>
+            </a:pPr>
+            <a:r>
+              <a:rPr sz="1400">
+                <a:solidFill>
+                  <a:srgbClr val="334E68"/>
+                </a:solidFill>
+                <a:latin typeface="Calibri"/>
+              </a:rPr>
+              <a:t>5. En el modo de demora, ¿cuándo empieza a descontarse el tiempo principal?</a:t>
+            </a:r>
+          </a:p>
+          <a:p>
+            <a:pPr>
+              <a:spcAft>
+                <a:spcPts val="600"/>
+              </a:spcAft>
+            </a:pPr>
+            <a:r>
+              <a:rPr sz="1400">
+                <a:solidFill>
+                  <a:srgbClr val="334E68"/>
+                </a:solidFill>
+                <a:latin typeface="Calibri"/>
+              </a:rPr>
+              <a:t>6. Si el reglamento no fija tiempo de incomparecencia, ¿cuál es?</a:t>
+            </a:r>
+          </a:p>
+        </p:txBody>
+      </p:sp>
+    </p:spTree>
+  </p:cSld>
+  <p:clrMapOvr>
+    <a:masterClrMapping/>
+  </p:clrMapOvr>
+</p:sld>
+</file>
+
+<file path=ppt/slides/slide23.xml><?xml version="1.0" encoding="utf-8"?>
+<p:sld xmlns:a="http://schemas.openxmlformats.org/drawingml/2006/main" xmlns:p="http://schemas.openxmlformats.org/presentationml/2006/main" xmlns:r="http://schemas.openxmlformats.org/officeDocument/2006/relationships">
+  <p:cSld>
+    <p:spTree>
+      <p:nvGrpSpPr>
+        <p:cNvPr id="1" name=""/>
+        <p:cNvGrpSpPr/>
+        <p:nvPr/>
+      </p:nvGrpSpPr>
+      <p:grpSpPr/>
+      <p:sp>
+        <p:nvSpPr>
+          <p:cNvPr id="2" name="Rectangle 1"/>
+          <p:cNvSpPr/>
+          <p:nvPr/>
+        </p:nvSpPr>
+        <p:spPr>
+          <a:xfrm>
+            <a:off x="0" y="0"/>
+            <a:ext cx="12191695" cy="6858000"/>
+          </a:xfrm>
+          <a:prstGeom prst="rect">
+            <a:avLst/>
+          </a:prstGeom>
+          <a:solidFill>
+            <a:srgbClr val="0A1F33"/>
+          </a:solidFill>
+          <a:ln>
+            <a:noFill/>
+          </a:ln>
+          <a:effectLst/>
+        </p:spPr>
+        <p:style>
+          <a:lnRef idx="1">
+            <a:schemeClr val="accent1"/>
+          </a:lnRef>
+          <a:fillRef idx="3">
+            <a:schemeClr val="accent1"/>
+          </a:fillRef>
+          <a:effectRef idx="2">
+            <a:schemeClr val="accent1"/>
+          </a:effectRef>
+          <a:fontRef idx="minor">
+            <a:schemeClr val="lt1"/>
+          </a:fontRef>
+        </p:style>
+        <p:txBody>
+          <a:bodyPr rtlCol="0" anchor="ctr"/>
+          <a:lstStyle/>
+          <a:p>
+            <a:pPr algn="ctr"/>
+          </a:p>
+        </p:txBody>
+      </p:sp>
+      <p:sp>
+        <p:nvSpPr>
+          <p:cNvPr id="3" name="TextBox 2"/>
+          <p:cNvSpPr txBox="1"/>
+          <p:nvPr/>
+        </p:nvSpPr>
+        <p:spPr>
+          <a:xfrm>
+            <a:off x="548640" y="731520"/>
+            <a:ext cx="11064240" cy="457200"/>
+          </a:xfrm>
+          <a:prstGeom prst="rect">
+            <a:avLst/>
+          </a:prstGeom>
+          <a:noFill/>
+        </p:spPr>
+        <p:txBody>
+          <a:bodyPr wrap="square">
+            <a:spAutoFit/>
+          </a:bodyPr>
+          <a:lstStyle/>
+          <a:p>
+            <a:r>
+              <a:rPr sz="1400" b="1">
+                <a:solidFill>
+                  <a:srgbClr val="F0B429"/>
+                </a:solidFill>
+                <a:latin typeface="Calibri"/>
+              </a:rPr>
+              <a:t>TAREA PARA LA PRÓXIMA SESIÓN</a:t>
+            </a:r>
+          </a:p>
+        </p:txBody>
+      </p:sp>
+      <p:sp>
+        <p:nvSpPr>
+          <p:cNvPr id="4" name="TextBox 3"/>
+          <p:cNvSpPr txBox="1"/>
+          <p:nvPr/>
+        </p:nvSpPr>
+        <p:spPr>
+          <a:xfrm>
+            <a:off x="548640" y="1371600"/>
+            <a:ext cx="11064240" cy="2926080"/>
+          </a:xfrm>
+          <a:prstGeom prst="rect">
+            <a:avLst/>
+          </a:prstGeom>
+          <a:noFill/>
+        </p:spPr>
+        <p:txBody>
+          <a:bodyPr wrap="square">
+            <a:spAutoFit/>
+          </a:bodyPr>
+          <a:lstStyle/>
+          <a:p>
+            <a:r>
+              <a:rPr sz="2400" b="0">
+                <a:solidFill>
+                  <a:srgbClr val="FFFFFF"/>
+                </a:solidFill>
+                <a:latin typeface="Cambria"/>
+              </a:rPr>
+              <a:t>Completar una ficha con la configuración correcta del reloj (tiempo base e incremento) para tres modalidades, según la normativa JDE.</a:t>
+            </a:r>
+          </a:p>
+        </p:txBody>
+      </p:sp>
+      <p:sp>
+        <p:nvSpPr>
+          <p:cNvPr id="5" name="TextBox 4"/>
+          <p:cNvSpPr txBox="1"/>
+          <p:nvPr/>
+        </p:nvSpPr>
+        <p:spPr>
+          <a:xfrm>
+            <a:off x="548640" y="4754880"/>
+            <a:ext cx="11064240" cy="914400"/>
+          </a:xfrm>
+          <a:prstGeom prst="rect">
+            <a:avLst/>
+          </a:prstGeom>
+          <a:noFill/>
+        </p:spPr>
+        <p:txBody>
+          <a:bodyPr wrap="square">
+            <a:spAutoFit/>
+          </a:bodyPr>
+          <a:lstStyle/>
+          <a:p>
+            <a:r>
+              <a:rPr sz="1800" b="0">
+                <a:solidFill>
+                  <a:srgbClr val="CADCFC"/>
+                </a:solidFill>
+                <a:latin typeface="Calibri"/>
+              </a:rPr>
+              <a:t>¿Dudas? Este es el momento. Gracias por tu participación.</a:t>
+            </a:r>
+          </a:p>
+        </p:txBody>
+      </p:sp>
+      <p:sp>
+        <p:nvSpPr>
+          <p:cNvPr id="6" name="TextBox 5"/>
+          <p:cNvSpPr txBox="1"/>
+          <p:nvPr/>
+        </p:nvSpPr>
+        <p:spPr>
+          <a:xfrm>
+            <a:off x="548640" y="6263640"/>
+            <a:ext cx="11064240" cy="365760"/>
+          </a:xfrm>
+          <a:prstGeom prst="rect">
+            <a:avLst/>
+          </a:prstGeom>
+          <a:noFill/>
+        </p:spPr>
+        <p:txBody>
+          <a:bodyPr wrap="square">
+            <a:spAutoFit/>
+          </a:bodyPr>
+          <a:lstStyle/>
+          <a:p>
+            <a:r>
+              <a:rPr sz="1200" b="0">
+                <a:solidFill>
+                  <a:srgbClr val="9FB3C8"/>
+                </a:solidFill>
+                <a:latin typeface="Calibri"/>
+              </a:rPr>
+              <a:t>Formación Ajedrez · Sesión 5 · ajedrez-integral.com</a:t>
             </a:r>
           </a:p>
         </p:txBody>
@@ -3808,7 +7029,7 @@
                 </a:solidFill>
                 <a:latin typeface="Calibri"/>
               </a:rPr>
-              <a:t>⚖</a:t>
+              <a:t>◷</a:t>
             </a:r>
           </a:p>
         </p:txBody>
@@ -3822,7 +7043,7 @@
         <p:spPr>
           <a:xfrm>
             <a:off x="1234440" y="530352"/>
-            <a:ext cx="7315200" cy="457200"/>
+            <a:ext cx="9144000" cy="457200"/>
           </a:xfrm>
           <a:prstGeom prst="rect">
             <a:avLst/>
@@ -3842,123 +7063,753 @@
                 </a:solidFill>
                 <a:latin typeface="Calibri"/>
               </a:rPr>
-              <a:t>CONTENIDO DE LA SESIÓN</a:t>
-            </a:r>
-          </a:p>
-        </p:txBody>
-      </p:sp>
-      <p:sp>
-        <p:nvSpPr>
-          <p:cNvPr id="5" name="TextBox 4"/>
-          <p:cNvSpPr txBox="1"/>
-          <p:nvPr/>
-        </p:nvSpPr>
-        <p:spPr>
-          <a:xfrm>
-            <a:off x="548640" y="1051560"/>
-            <a:ext cx="11064240" cy="822960"/>
-          </a:xfrm>
-          <a:prstGeom prst="rect">
-            <a:avLst/>
-          </a:prstGeom>
-          <a:noFill/>
-        </p:spPr>
-        <p:txBody>
-          <a:bodyPr wrap="square">
-            <a:spAutoFit/>
-          </a:bodyPr>
-          <a:lstStyle/>
-          <a:p>
-            <a:r>
-              <a:rPr sz="2400" b="1">
-                <a:solidFill>
-                  <a:srgbClr val="0A1F33"/>
-                </a:solidFill>
-                <a:latin typeface="Cambria"/>
-              </a:rPr>
-              <a:t>Uso, configuración y control del reloj de ajedrez</a:t>
-            </a:r>
-          </a:p>
-        </p:txBody>
-      </p:sp>
-      <p:sp>
-        <p:nvSpPr>
-          <p:cNvPr id="6" name="Rectangle 5"/>
-          <p:cNvSpPr/>
-          <p:nvPr/>
-        </p:nvSpPr>
-        <p:spPr>
-          <a:xfrm>
-            <a:off x="548640" y="1965960"/>
-            <a:ext cx="11064240" cy="4297680"/>
-          </a:xfrm>
-          <a:prstGeom prst="rect">
-            <a:avLst/>
-          </a:prstGeom>
-          <a:solidFill>
-            <a:srgbClr val="F0F4F8"/>
-          </a:solidFill>
-          <a:ln>
-            <a:noFill/>
-          </a:ln>
-          <a:effectLst/>
-        </p:spPr>
-        <p:style>
-          <a:lnRef idx="1">
-            <a:schemeClr val="accent1"/>
-          </a:lnRef>
-          <a:fillRef idx="3">
-            <a:schemeClr val="accent1"/>
-          </a:fillRef>
-          <a:effectRef idx="2">
-            <a:schemeClr val="accent1"/>
-          </a:effectRef>
-          <a:fontRef idx="minor">
-            <a:schemeClr val="lt1"/>
-          </a:fontRef>
-        </p:style>
-        <p:txBody>
-          <a:bodyPr rtlCol="0" anchor="ctr"/>
-          <a:lstStyle/>
-          <a:p>
-            <a:pPr algn="ctr"/>
-          </a:p>
-        </p:txBody>
-      </p:sp>
-      <p:sp>
-        <p:nvSpPr>
-          <p:cNvPr id="7" name="TextBox 6"/>
-          <p:cNvSpPr txBox="1"/>
-          <p:nvPr/>
-        </p:nvSpPr>
-        <p:spPr>
-          <a:xfrm>
-            <a:off x="1005840" y="2331720"/>
-            <a:ext cx="10241280" cy="3566160"/>
-          </a:xfrm>
-          <a:prstGeom prst="rect">
-            <a:avLst/>
-          </a:prstGeom>
-          <a:noFill/>
-        </p:spPr>
-        <p:txBody>
-          <a:bodyPr wrap="square">
-            <a:spAutoFit/>
-          </a:bodyPr>
-          <a:lstStyle/>
-          <a:p>
-            <a:r>
-              <a:rPr sz="1600" b="0">
-                <a:solidFill>
-                  <a:srgbClr val="334E68"/>
-                </a:solidFill>
-                <a:latin typeface="Calibri"/>
-              </a:rPr>
-              <a:t>Configuración del reloj según la modalidad de juego (clásico, rápido, relámpago).</a:t>
-            </a:r>
-          </a:p>
-        </p:txBody>
-      </p:sp>
+              <a:t>CRONOGRAMA DE LA SESIÓN · 5 HORAS</a:t>
+            </a:r>
+          </a:p>
+        </p:txBody>
+      </p:sp>
+      <p:graphicFrame>
+        <p:nvGraphicFramePr>
+          <p:cNvPr id="5" name="Table 4"/>
+          <p:cNvGraphicFramePr>
+            <a:graphicFrameLocks noGrp="1"/>
+          </p:cNvGraphicFramePr>
+          <p:nvPr/>
+        </p:nvGraphicFramePr>
+        <p:xfrm>
+          <a:off x="548640" y="1143000"/>
+          <a:ext cx="11064240" cy="5029200"/>
+        </p:xfrm>
+        <a:graphic>
+          <a:graphicData uri="http://schemas.openxmlformats.org/drawingml/2006/table">
+            <a:tbl>
+              <a:tblPr firstRow="1" bandRow="1">
+                <a:tableStyleId>{5C22544A-7EE6-4342-B048-85BDC9FD1C3A}</a:tableStyleId>
+              </a:tblPr>
+              <a:tblGrid>
+                <a:gridCol w="1737360"/>
+                <a:gridCol w="1188720"/>
+                <a:gridCol w="8138160"/>
+              </a:tblGrid>
+              <a:tr h="457200">
+                <a:tc>
+                  <a:txBody>
+                    <a:bodyPr/>
+                    <a:lstStyle/>
+                    <a:p>
+                      <a:r>
+                        <a:rPr sz="1300" b="1">
+                          <a:solidFill>
+                            <a:srgbClr val="FFFFFF"/>
+                          </a:solidFill>
+                        </a:rPr>
+                        <a:t>Tiempo</a:t>
+                      </a:r>
+                    </a:p>
+                  </a:txBody>
+                  <a:tcPr>
+                    <a:solidFill>
+                      <a:srgbClr val="102A43"/>
+                    </a:solidFill>
+                  </a:tcPr>
+                </a:tc>
+                <a:tc>
+                  <a:txBody>
+                    <a:bodyPr/>
+                    <a:lstStyle/>
+                    <a:p>
+                      <a:r>
+                        <a:rPr sz="1300" b="1">
+                          <a:solidFill>
+                            <a:srgbClr val="FFFFFF"/>
+                          </a:solidFill>
+                        </a:rPr>
+                        <a:t>Duración</a:t>
+                      </a:r>
+                    </a:p>
+                  </a:txBody>
+                  <a:tcPr>
+                    <a:solidFill>
+                      <a:srgbClr val="102A43"/>
+                    </a:solidFill>
+                  </a:tcPr>
+                </a:tc>
+                <a:tc>
+                  <a:txBody>
+                    <a:bodyPr/>
+                    <a:lstStyle/>
+                    <a:p>
+                      <a:r>
+                        <a:rPr sz="1300" b="1">
+                          <a:solidFill>
+                            <a:srgbClr val="FFFFFF"/>
+                          </a:solidFill>
+                        </a:rPr>
+                        <a:t>Actividad</a:t>
+                      </a:r>
+                    </a:p>
+                  </a:txBody>
+                  <a:tcPr>
+                    <a:solidFill>
+                      <a:srgbClr val="102A43"/>
+                    </a:solidFill>
+                  </a:tcPr>
+                </a:tc>
+              </a:tr>
+              <a:tr h="457200">
+                <a:tc>
+                  <a:txBody>
+                    <a:bodyPr/>
+                    <a:lstStyle/>
+                    <a:p>
+                      <a:r>
+                        <a:rPr sz="1200" b="0">
+                          <a:solidFill>
+                            <a:srgbClr val="334E68"/>
+                          </a:solidFill>
+                        </a:rPr>
+                        <a:t>0:00 – 0:15</a:t>
+                      </a:r>
+                    </a:p>
+                  </a:txBody>
+                  <a:tcPr>
+                    <a:solidFill>
+                      <a:srgbClr val="F0F4F8"/>
+                    </a:solidFill>
+                  </a:tcPr>
+                </a:tc>
+                <a:tc>
+                  <a:txBody>
+                    <a:bodyPr/>
+                    <a:lstStyle/>
+                    <a:p>
+                      <a:r>
+                        <a:rPr sz="1200" b="0">
+                          <a:solidFill>
+                            <a:srgbClr val="334E68"/>
+                          </a:solidFill>
+                        </a:rPr>
+                        <a:t>15 min</a:t>
+                      </a:r>
+                    </a:p>
+                  </a:txBody>
+                  <a:tcPr>
+                    <a:solidFill>
+                      <a:srgbClr val="F0F4F8"/>
+                    </a:solidFill>
+                  </a:tcPr>
+                </a:tc>
+                <a:tc>
+                  <a:txBody>
+                    <a:bodyPr/>
+                    <a:lstStyle/>
+                    <a:p>
+                      <a:r>
+                        <a:rPr sz="1200" b="0">
+                          <a:solidFill>
+                            <a:srgbClr val="334E68"/>
+                          </a:solidFill>
+                        </a:rPr>
+                        <a:t>Repaso y revisión de la tarea</a:t>
+                      </a:r>
+                    </a:p>
+                  </a:txBody>
+                  <a:tcPr>
+                    <a:solidFill>
+                      <a:srgbClr val="F0F4F8"/>
+                    </a:solidFill>
+                  </a:tcPr>
+                </a:tc>
+              </a:tr>
+              <a:tr h="457200">
+                <a:tc>
+                  <a:txBody>
+                    <a:bodyPr/>
+                    <a:lstStyle/>
+                    <a:p>
+                      <a:r>
+                        <a:rPr sz="1200" b="0">
+                          <a:solidFill>
+                            <a:srgbClr val="334E68"/>
+                          </a:solidFill>
+                        </a:rPr>
+                        <a:t>0:15 – 0:55</a:t>
+                      </a:r>
+                    </a:p>
+                  </a:txBody>
+                  <a:tcPr>
+                    <a:solidFill>
+                      <a:srgbClr val="FFFFFF"/>
+                    </a:solidFill>
+                  </a:tcPr>
+                </a:tc>
+                <a:tc>
+                  <a:txBody>
+                    <a:bodyPr/>
+                    <a:lstStyle/>
+                    <a:p>
+                      <a:r>
+                        <a:rPr sz="1200" b="0">
+                          <a:solidFill>
+                            <a:srgbClr val="334E68"/>
+                          </a:solidFill>
+                        </a:rPr>
+                        <a:t>40 min</a:t>
+                      </a:r>
+                    </a:p>
+                  </a:txBody>
+                  <a:tcPr>
+                    <a:solidFill>
+                      <a:srgbClr val="FFFFFF"/>
+                    </a:solidFill>
+                  </a:tcPr>
+                </a:tc>
+                <a:tc>
+                  <a:txBody>
+                    <a:bodyPr/>
+                    <a:lstStyle/>
+                    <a:p>
+                      <a:r>
+                        <a:rPr sz="1200" b="0">
+                          <a:solidFill>
+                            <a:srgbClr val="334E68"/>
+                          </a:solidFill>
+                        </a:rPr>
+                        <a:t>El reloj en las Leyes</a:t>
+                      </a:r>
+                    </a:p>
+                  </a:txBody>
+                  <a:tcPr>
+                    <a:solidFill>
+                      <a:srgbClr val="FFFFFF"/>
+                    </a:solidFill>
+                  </a:tcPr>
+                </a:tc>
+              </a:tr>
+              <a:tr h="457200">
+                <a:tc>
+                  <a:txBody>
+                    <a:bodyPr/>
+                    <a:lstStyle/>
+                    <a:p>
+                      <a:r>
+                        <a:rPr sz="1200" b="0">
+                          <a:solidFill>
+                            <a:srgbClr val="334E68"/>
+                          </a:solidFill>
+                        </a:rPr>
+                        <a:t>0:55 – 1:35</a:t>
+                      </a:r>
+                    </a:p>
+                  </a:txBody>
+                  <a:tcPr>
+                    <a:solidFill>
+                      <a:srgbClr val="F0F4F8"/>
+                    </a:solidFill>
+                  </a:tcPr>
+                </a:tc>
+                <a:tc>
+                  <a:txBody>
+                    <a:bodyPr/>
+                    <a:lstStyle/>
+                    <a:p>
+                      <a:r>
+                        <a:rPr sz="1200" b="0">
+                          <a:solidFill>
+                            <a:srgbClr val="334E68"/>
+                          </a:solidFill>
+                        </a:rPr>
+                        <a:t>40 min</a:t>
+                      </a:r>
+                    </a:p>
+                  </a:txBody>
+                  <a:tcPr>
+                    <a:solidFill>
+                      <a:srgbClr val="F0F4F8"/>
+                    </a:solidFill>
+                  </a:tcPr>
+                </a:tc>
+                <a:tc>
+                  <a:txBody>
+                    <a:bodyPr/>
+                    <a:lstStyle/>
+                    <a:p>
+                      <a:r>
+                        <a:rPr sz="1200" b="0">
+                          <a:solidFill>
+                            <a:srgbClr val="334E68"/>
+                          </a:solidFill>
+                        </a:rPr>
+                        <a:t>Sistemas de control de tiempo</a:t>
+                      </a:r>
+                    </a:p>
+                  </a:txBody>
+                  <a:tcPr>
+                    <a:solidFill>
+                      <a:srgbClr val="F0F4F8"/>
+                    </a:solidFill>
+                  </a:tcPr>
+                </a:tc>
+              </a:tr>
+              <a:tr h="457200">
+                <a:tc>
+                  <a:txBody>
+                    <a:bodyPr/>
+                    <a:lstStyle/>
+                    <a:p>
+                      <a:r>
+                        <a:rPr sz="1200" b="1">
+                          <a:solidFill>
+                            <a:srgbClr val="DE911D"/>
+                          </a:solidFill>
+                        </a:rPr>
+                        <a:t>1:35 – 1:50</a:t>
+                      </a:r>
+                    </a:p>
+                  </a:txBody>
+                  <a:tcPr>
+                    <a:solidFill>
+                      <a:srgbClr val="FFFFFF"/>
+                    </a:solidFill>
+                  </a:tcPr>
+                </a:tc>
+                <a:tc>
+                  <a:txBody>
+                    <a:bodyPr/>
+                    <a:lstStyle/>
+                    <a:p>
+                      <a:r>
+                        <a:rPr sz="1200" b="1">
+                          <a:solidFill>
+                            <a:srgbClr val="DE911D"/>
+                          </a:solidFill>
+                        </a:rPr>
+                        <a:t>15 min</a:t>
+                      </a:r>
+                    </a:p>
+                  </a:txBody>
+                  <a:tcPr>
+                    <a:solidFill>
+                      <a:srgbClr val="FFFFFF"/>
+                    </a:solidFill>
+                  </a:tcPr>
+                </a:tc>
+                <a:tc>
+                  <a:txBody>
+                    <a:bodyPr/>
+                    <a:lstStyle/>
+                    <a:p>
+                      <a:r>
+                        <a:rPr sz="1200" b="1">
+                          <a:solidFill>
+                            <a:srgbClr val="DE911D"/>
+                          </a:solidFill>
+                        </a:rPr>
+                        <a:t>Receso</a:t>
+                      </a:r>
+                    </a:p>
+                  </a:txBody>
+                  <a:tcPr>
+                    <a:solidFill>
+                      <a:srgbClr val="FFFFFF"/>
+                    </a:solidFill>
+                  </a:tcPr>
+                </a:tc>
+              </a:tr>
+              <a:tr h="457200">
+                <a:tc>
+                  <a:txBody>
+                    <a:bodyPr/>
+                    <a:lstStyle/>
+                    <a:p>
+                      <a:r>
+                        <a:rPr sz="1200" b="0">
+                          <a:solidFill>
+                            <a:srgbClr val="334E68"/>
+                          </a:solidFill>
+                        </a:rPr>
+                        <a:t>1:50 – 2:35</a:t>
+                      </a:r>
+                    </a:p>
+                  </a:txBody>
+                  <a:tcPr>
+                    <a:solidFill>
+                      <a:srgbClr val="F0F4F8"/>
+                    </a:solidFill>
+                  </a:tcPr>
+                </a:tc>
+                <a:tc>
+                  <a:txBody>
+                    <a:bodyPr/>
+                    <a:lstStyle/>
+                    <a:p>
+                      <a:r>
+                        <a:rPr sz="1200" b="0">
+                          <a:solidFill>
+                            <a:srgbClr val="334E68"/>
+                          </a:solidFill>
+                        </a:rPr>
+                        <a:t>45 min</a:t>
+                      </a:r>
+                    </a:p>
+                  </a:txBody>
+                  <a:tcPr>
+                    <a:solidFill>
+                      <a:srgbClr val="F0F4F8"/>
+                    </a:solidFill>
+                  </a:tcPr>
+                </a:tc>
+                <a:tc>
+                  <a:txBody>
+                    <a:bodyPr/>
+                    <a:lstStyle/>
+                    <a:p>
+                      <a:r>
+                        <a:rPr sz="1200" b="0">
+                          <a:solidFill>
+                            <a:srgbClr val="334E68"/>
+                          </a:solidFill>
+                        </a:rPr>
+                        <a:t>Configuración según la modalidad</a:t>
+                      </a:r>
+                    </a:p>
+                  </a:txBody>
+                  <a:tcPr>
+                    <a:solidFill>
+                      <a:srgbClr val="F0F4F8"/>
+                    </a:solidFill>
+                  </a:tcPr>
+                </a:tc>
+              </a:tr>
+              <a:tr h="457200">
+                <a:tc>
+                  <a:txBody>
+                    <a:bodyPr/>
+                    <a:lstStyle/>
+                    <a:p>
+                      <a:r>
+                        <a:rPr sz="1200" b="0">
+                          <a:solidFill>
+                            <a:srgbClr val="334E68"/>
+                          </a:solidFill>
+                        </a:rPr>
+                        <a:t>2:35 – 3:05</a:t>
+                      </a:r>
+                    </a:p>
+                  </a:txBody>
+                  <a:tcPr>
+                    <a:solidFill>
+                      <a:srgbClr val="FFFFFF"/>
+                    </a:solidFill>
+                  </a:tcPr>
+                </a:tc>
+                <a:tc>
+                  <a:txBody>
+                    <a:bodyPr/>
+                    <a:lstStyle/>
+                    <a:p>
+                      <a:r>
+                        <a:rPr sz="1200" b="0">
+                          <a:solidFill>
+                            <a:srgbClr val="334E68"/>
+                          </a:solidFill>
+                        </a:rPr>
+                        <a:t>30 min</a:t>
+                      </a:r>
+                    </a:p>
+                  </a:txBody>
+                  <a:tcPr>
+                    <a:solidFill>
+                      <a:srgbClr val="FFFFFF"/>
+                    </a:solidFill>
+                  </a:tcPr>
+                </a:tc>
+                <a:tc>
+                  <a:txBody>
+                    <a:bodyPr/>
+                    <a:lstStyle/>
+                    <a:p>
+                      <a:r>
+                        <a:rPr sz="1200" b="0">
+                          <a:solidFill>
+                            <a:srgbClr val="334E68"/>
+                          </a:solidFill>
+                        </a:rPr>
+                        <a:t>Incidencias de tiempo</a:t>
+                      </a:r>
+                    </a:p>
+                  </a:txBody>
+                  <a:tcPr>
+                    <a:solidFill>
+                      <a:srgbClr val="FFFFFF"/>
+                    </a:solidFill>
+                  </a:tcPr>
+                </a:tc>
+              </a:tr>
+              <a:tr h="457200">
+                <a:tc>
+                  <a:txBody>
+                    <a:bodyPr/>
+                    <a:lstStyle/>
+                    <a:p>
+                      <a:r>
+                        <a:rPr sz="1200" b="1">
+                          <a:solidFill>
+                            <a:srgbClr val="DE911D"/>
+                          </a:solidFill>
+                        </a:rPr>
+                        <a:t>3:05 – 3:20</a:t>
+                      </a:r>
+                    </a:p>
+                  </a:txBody>
+                  <a:tcPr>
+                    <a:solidFill>
+                      <a:srgbClr val="F0F4F8"/>
+                    </a:solidFill>
+                  </a:tcPr>
+                </a:tc>
+                <a:tc>
+                  <a:txBody>
+                    <a:bodyPr/>
+                    <a:lstStyle/>
+                    <a:p>
+                      <a:r>
+                        <a:rPr sz="1200" b="1">
+                          <a:solidFill>
+                            <a:srgbClr val="DE911D"/>
+                          </a:solidFill>
+                        </a:rPr>
+                        <a:t>15 min</a:t>
+                      </a:r>
+                    </a:p>
+                  </a:txBody>
+                  <a:tcPr>
+                    <a:solidFill>
+                      <a:srgbClr val="F0F4F8"/>
+                    </a:solidFill>
+                  </a:tcPr>
+                </a:tc>
+                <a:tc>
+                  <a:txBody>
+                    <a:bodyPr/>
+                    <a:lstStyle/>
+                    <a:p>
+                      <a:r>
+                        <a:rPr sz="1200" b="1">
+                          <a:solidFill>
+                            <a:srgbClr val="DE911D"/>
+                          </a:solidFill>
+                        </a:rPr>
+                        <a:t>Receso</a:t>
+                      </a:r>
+                    </a:p>
+                  </a:txBody>
+                  <a:tcPr>
+                    <a:solidFill>
+                      <a:srgbClr val="F0F4F8"/>
+                    </a:solidFill>
+                  </a:tcPr>
+                </a:tc>
+              </a:tr>
+              <a:tr h="457200">
+                <a:tc>
+                  <a:txBody>
+                    <a:bodyPr/>
+                    <a:lstStyle/>
+                    <a:p>
+                      <a:r>
+                        <a:rPr sz="1200" b="0">
+                          <a:solidFill>
+                            <a:srgbClr val="334E68"/>
+                          </a:solidFill>
+                        </a:rPr>
+                        <a:t>3:20 – 4:05</a:t>
+                      </a:r>
+                    </a:p>
+                  </a:txBody>
+                  <a:tcPr>
+                    <a:solidFill>
+                      <a:srgbClr val="FFFFFF"/>
+                    </a:solidFill>
+                  </a:tcPr>
+                </a:tc>
+                <a:tc>
+                  <a:txBody>
+                    <a:bodyPr/>
+                    <a:lstStyle/>
+                    <a:p>
+                      <a:r>
+                        <a:rPr sz="1200" b="0">
+                          <a:solidFill>
+                            <a:srgbClr val="334E68"/>
+                          </a:solidFill>
+                        </a:rPr>
+                        <a:t>45 min</a:t>
+                      </a:r>
+                    </a:p>
+                  </a:txBody>
+                  <a:tcPr>
+                    <a:solidFill>
+                      <a:srgbClr val="FFFFFF"/>
+                    </a:solidFill>
+                  </a:tcPr>
+                </a:tc>
+                <a:tc>
+                  <a:txBody>
+                    <a:bodyPr/>
+                    <a:lstStyle/>
+                    <a:p>
+                      <a:r>
+                        <a:rPr sz="1200" b="0">
+                          <a:solidFill>
+                            <a:srgbClr val="334E68"/>
+                          </a:solidFill>
+                        </a:rPr>
+                        <a:t>Práctica: configurar el reloj por escenario</a:t>
+                      </a:r>
+                    </a:p>
+                  </a:txBody>
+                  <a:tcPr>
+                    <a:solidFill>
+                      <a:srgbClr val="FFFFFF"/>
+                    </a:solidFill>
+                  </a:tcPr>
+                </a:tc>
+              </a:tr>
+              <a:tr h="457200">
+                <a:tc>
+                  <a:txBody>
+                    <a:bodyPr/>
+                    <a:lstStyle/>
+                    <a:p>
+                      <a:r>
+                        <a:rPr sz="1200" b="0">
+                          <a:solidFill>
+                            <a:srgbClr val="334E68"/>
+                          </a:solidFill>
+                        </a:rPr>
+                        <a:t>4:05 – 4:40</a:t>
+                      </a:r>
+                    </a:p>
+                  </a:txBody>
+                  <a:tcPr>
+                    <a:solidFill>
+                      <a:srgbClr val="F0F4F8"/>
+                    </a:solidFill>
+                  </a:tcPr>
+                </a:tc>
+                <a:tc>
+                  <a:txBody>
+                    <a:bodyPr/>
+                    <a:lstStyle/>
+                    <a:p>
+                      <a:r>
+                        <a:rPr sz="1200" b="0">
+                          <a:solidFill>
+                            <a:srgbClr val="334E68"/>
+                          </a:solidFill>
+                        </a:rPr>
+                        <a:t>35 min</a:t>
+                      </a:r>
+                    </a:p>
+                  </a:txBody>
+                  <a:tcPr>
+                    <a:solidFill>
+                      <a:srgbClr val="F0F4F8"/>
+                    </a:solidFill>
+                  </a:tcPr>
+                </a:tc>
+                <a:tc>
+                  <a:txBody>
+                    <a:bodyPr/>
+                    <a:lstStyle/>
+                    <a:p>
+                      <a:r>
+                        <a:rPr sz="1200" b="0">
+                          <a:solidFill>
+                            <a:srgbClr val="334E68"/>
+                          </a:solidFill>
+                        </a:rPr>
+                        <a:t>Quiz de la sesión</a:t>
+                      </a:r>
+                    </a:p>
+                  </a:txBody>
+                  <a:tcPr>
+                    <a:solidFill>
+                      <a:srgbClr val="F0F4F8"/>
+                    </a:solidFill>
+                  </a:tcPr>
+                </a:tc>
+              </a:tr>
+              <a:tr h="457200">
+                <a:tc>
+                  <a:txBody>
+                    <a:bodyPr/>
+                    <a:lstStyle/>
+                    <a:p>
+                      <a:r>
+                        <a:rPr sz="1200" b="0">
+                          <a:solidFill>
+                            <a:srgbClr val="334E68"/>
+                          </a:solidFill>
+                        </a:rPr>
+                        <a:t>4:40 – 5:00</a:t>
+                      </a:r>
+                    </a:p>
+                  </a:txBody>
+                  <a:tcPr>
+                    <a:solidFill>
+                      <a:srgbClr val="FFFFFF"/>
+                    </a:solidFill>
+                  </a:tcPr>
+                </a:tc>
+                <a:tc>
+                  <a:txBody>
+                    <a:bodyPr/>
+                    <a:lstStyle/>
+                    <a:p>
+                      <a:r>
+                        <a:rPr sz="1200" b="0">
+                          <a:solidFill>
+                            <a:srgbClr val="334E68"/>
+                          </a:solidFill>
+                        </a:rPr>
+                        <a:t>20 min</a:t>
+                      </a:r>
+                    </a:p>
+                  </a:txBody>
+                  <a:tcPr>
+                    <a:solidFill>
+                      <a:srgbClr val="FFFFFF"/>
+                    </a:solidFill>
+                  </a:tcPr>
+                </a:tc>
+                <a:tc>
+                  <a:txBody>
+                    <a:bodyPr/>
+                    <a:lstStyle/>
+                    <a:p>
+                      <a:r>
+                        <a:rPr sz="1200" b="0">
+                          <a:solidFill>
+                            <a:srgbClr val="334E68"/>
+                          </a:solidFill>
+                        </a:rPr>
+                        <a:t>Cierre</a:t>
+                      </a:r>
+                    </a:p>
+                  </a:txBody>
+                  <a:tcPr>
+                    <a:solidFill>
+                      <a:srgbClr val="FFFFFF"/>
+                    </a:solidFill>
+                  </a:tcPr>
+                </a:tc>
+              </a:tr>
+            </a:tbl>
+          </a:graphicData>
+        </a:graphic>
+      </p:graphicFrame>
     </p:spTree>
   </p:cSld>
   <p:clrMapOvr>
@@ -4065,7 +7916,7 @@
         <p:spPr>
           <a:xfrm>
             <a:off x="1234440" y="530352"/>
-            <a:ext cx="7315200" cy="457200"/>
+            <a:ext cx="9144000" cy="457200"/>
           </a:xfrm>
           <a:prstGeom prst="rect">
             <a:avLst/>
@@ -4085,7 +7936,7 @@
                 </a:solidFill>
                 <a:latin typeface="Calibri"/>
               </a:rPr>
-              <a:t>CONTENIDO DE LA SESIÓN</a:t>
+              <a:t>CONTENIDO PARA VER EN CLASE</a:t>
             </a:r>
           </a:p>
         </p:txBody>
@@ -4113,13 +7964,13 @@
           <a:lstStyle/>
           <a:p>
             <a:r>
-              <a:rPr sz="2400" b="1">
+              <a:rPr sz="2600" b="1">
                 <a:solidFill>
                   <a:srgbClr val="0A1F33"/>
                 </a:solidFill>
                 <a:latin typeface="Cambria"/>
               </a:rPr>
-              <a:t>Uso, configuración y control del reloj de ajedrez</a:t>
+              <a:t>El uso del reloj durante la partida</a:t>
             </a:r>
           </a:p>
         </p:txBody>
@@ -4132,8 +7983,8 @@
         </p:nvSpPr>
         <p:spPr>
           <a:xfrm>
-            <a:off x="548640" y="1965960"/>
-            <a:ext cx="11064240" cy="4297680"/>
+            <a:off x="548640" y="1874519"/>
+            <a:ext cx="11064240" cy="4389120"/>
           </a:xfrm>
           <a:prstGeom prst="rect">
             <a:avLst/>
@@ -4176,8 +8027,8 @@
         </p:nvSpPr>
         <p:spPr>
           <a:xfrm>
-            <a:off x="1005840" y="2331720"/>
-            <a:ext cx="10241280" cy="3566160"/>
+            <a:off x="914400" y="2011680"/>
+            <a:ext cx="10332720" cy="1371600"/>
           </a:xfrm>
           <a:prstGeom prst="rect">
             <a:avLst/>
@@ -4191,13 +8042,134 @@
           <a:lstStyle/>
           <a:p>
             <a:r>
-              <a:rPr sz="1600" b="0">
+              <a:rPr sz="1500" b="0">
+                <a:solidFill>
+                  <a:srgbClr val="0A1F33"/>
+                </a:solidFill>
+                <a:latin typeface="Calibri"/>
+              </a:rPr>
+              <a:t>A la hora de inicio se pone en marcha el reloj de las blancas, esté o no el jugador en la mesa. El árbitro decide de qué lado del tablero va el reloj. Cada jugador mueve y después presiona el reloj, con la misma mano con la que movió.</a:t>
+            </a:r>
+          </a:p>
+        </p:txBody>
+      </p:sp>
+      <p:sp>
+        <p:nvSpPr>
+          <p:cNvPr id="8" name="TextBox 7"/>
+          <p:cNvSpPr txBox="1"/>
+          <p:nvPr/>
+        </p:nvSpPr>
+        <p:spPr>
+          <a:xfrm>
+            <a:off x="914400" y="3429000"/>
+            <a:ext cx="10332720" cy="2743200"/>
+          </a:xfrm>
+          <a:prstGeom prst="rect">
+            <a:avLst/>
+          </a:prstGeom>
+          <a:noFill/>
+        </p:spPr>
+        <p:txBody>
+          <a:bodyPr wrap="square">
+            <a:spAutoFit/>
+          </a:bodyPr>
+          <a:lstStyle/>
+          <a:p>
+            <a:pPr>
+              <a:spcAft>
+                <a:spcPts val="800"/>
+              </a:spcAft>
+            </a:pPr>
+            <a:r>
+              <a:rPr sz="1500">
                 <a:solidFill>
                   <a:srgbClr val="334E68"/>
                 </a:solidFill>
                 <a:latin typeface="Calibri"/>
               </a:rPr>
-              <a:t>Penalizaciones e incidencias relacionadas con el manejo del tiempo.</a:t>
+              <a:t>•  No se puede dejar el dedo sobre el botón ni presionar con fuerza, levantar o volcar el reloj.</a:t>
+            </a:r>
+          </a:p>
+          <a:p>
+            <a:pPr>
+              <a:spcAft>
+                <a:spcPts val="800"/>
+              </a:spcAft>
+            </a:pPr>
+            <a:r>
+              <a:rPr sz="1500">
+                <a:solidFill>
+                  <a:srgbClr val="334E68"/>
+                </a:solidFill>
+                <a:latin typeface="Calibri"/>
+              </a:rPr>
+              <a:t>•  Solo quien tiene su reloj en marcha puede acomodar sus piezas.</a:t>
+            </a:r>
+          </a:p>
+          <a:p>
+            <a:pPr>
+              <a:spcAft>
+                <a:spcPts val="800"/>
+              </a:spcAft>
+            </a:pPr>
+            <a:r>
+              <a:rPr sz="1500">
+                <a:solidFill>
+                  <a:srgbClr val="334E68"/>
+                </a:solidFill>
+                <a:latin typeface="Calibri"/>
+              </a:rPr>
+              <a:t>•  Un jugador puede pausar el reloj para llamar al árbitro; la partida se reanuda cuando el árbitro lo decide.</a:t>
+            </a:r>
+          </a:p>
+          <a:p>
+            <a:pPr>
+              <a:spcAft>
+                <a:spcPts val="800"/>
+              </a:spcAft>
+            </a:pPr>
+            <a:r>
+              <a:rPr sz="1500">
+                <a:solidFill>
+                  <a:srgbClr val="334E68"/>
+                </a:solidFill>
+                <a:latin typeface="Calibri"/>
+              </a:rPr>
+              <a:t>•  La jugada queda hecha al soltar la pieza y completada al presionar el reloj.</a:t>
+            </a:r>
+          </a:p>
+        </p:txBody>
+      </p:sp>
+      <p:sp>
+        <p:nvSpPr>
+          <p:cNvPr id="9" name="TextBox 8"/>
+          <p:cNvSpPr txBox="1"/>
+          <p:nvPr/>
+        </p:nvSpPr>
+        <p:spPr>
+          <a:xfrm>
+            <a:off x="548640" y="6355080"/>
+            <a:ext cx="11064240" cy="365760"/>
+          </a:xfrm>
+          <a:prstGeom prst="rect">
+            <a:avLst/>
+          </a:prstGeom>
+          <a:noFill/>
+        </p:spPr>
+        <p:txBody>
+          <a:bodyPr wrap="square">
+            <a:spAutoFit/>
+          </a:bodyPr>
+          <a:lstStyle/>
+          <a:p>
+            <a:r>
+              <a:rPr sz="1100" b="0">
+                <a:solidFill>
+                  <a:srgbClr val="627D98"/>
+                </a:solidFill>
+                <a:latin typeface="Calibri"/>
+              </a:rPr>
+              <a:t>Fuente: Leyes del Ajedrez 2023 (Handbook E.I.01), art. 6.2, 6.5, 6.6 y 6.11</a:t>
             </a:r>
           </a:p>
         </p:txBody>
@@ -4222,6 +8194,1357 @@
       <p:grpSpPr/>
       <p:sp>
         <p:nvSpPr>
+          <p:cNvPr id="2" name="Oval 1"/>
+          <p:cNvSpPr/>
+          <p:nvPr/>
+        </p:nvSpPr>
+        <p:spPr>
+          <a:xfrm>
+            <a:off x="548640" y="502920"/>
+            <a:ext cx="502920" cy="502920"/>
+          </a:xfrm>
+          <a:prstGeom prst="ellipse">
+            <a:avLst/>
+          </a:prstGeom>
+          <a:solidFill>
+            <a:srgbClr val="DE911D"/>
+          </a:solidFill>
+          <a:ln>
+            <a:noFill/>
+          </a:ln>
+          <a:effectLst/>
+        </p:spPr>
+        <p:style>
+          <a:lnRef idx="1">
+            <a:schemeClr val="accent1"/>
+          </a:lnRef>
+          <a:fillRef idx="3">
+            <a:schemeClr val="accent1"/>
+          </a:fillRef>
+          <a:effectRef idx="2">
+            <a:schemeClr val="accent1"/>
+          </a:effectRef>
+          <a:fontRef idx="minor">
+            <a:schemeClr val="lt1"/>
+          </a:fontRef>
+        </p:style>
+        <p:txBody>
+          <a:bodyPr rtlCol="0" anchor="ctr"/>
+          <a:lstStyle/>
+          <a:p>
+            <a:pPr algn="ctr"/>
+          </a:p>
+        </p:txBody>
+      </p:sp>
+      <p:sp>
+        <p:nvSpPr>
+          <p:cNvPr id="3" name="TextBox 2"/>
+          <p:cNvSpPr txBox="1"/>
+          <p:nvPr/>
+        </p:nvSpPr>
+        <p:spPr>
+          <a:xfrm>
+            <a:off x="548640" y="502920"/>
+            <a:ext cx="502920" cy="502920"/>
+          </a:xfrm>
+          <a:prstGeom prst="rect">
+            <a:avLst/>
+          </a:prstGeom>
+          <a:noFill/>
+        </p:spPr>
+        <p:txBody>
+          <a:bodyPr wrap="square">
+            <a:spAutoFit/>
+          </a:bodyPr>
+          <a:lstStyle/>
+          <a:p>
+            <a:pPr algn="ctr"/>
+            <a:r>
+              <a:rPr sz="2000" b="0">
+                <a:solidFill>
+                  <a:srgbClr val="0A1F33"/>
+                </a:solidFill>
+                <a:latin typeface="Calibri"/>
+              </a:rPr>
+              <a:t>⚖</a:t>
+            </a:r>
+          </a:p>
+        </p:txBody>
+      </p:sp>
+      <p:sp>
+        <p:nvSpPr>
+          <p:cNvPr id="4" name="TextBox 3"/>
+          <p:cNvSpPr txBox="1"/>
+          <p:nvPr/>
+        </p:nvSpPr>
+        <p:spPr>
+          <a:xfrm>
+            <a:off x="1234440" y="530352"/>
+            <a:ext cx="9144000" cy="457200"/>
+          </a:xfrm>
+          <a:prstGeom prst="rect">
+            <a:avLst/>
+          </a:prstGeom>
+          <a:noFill/>
+        </p:spPr>
+        <p:txBody>
+          <a:bodyPr wrap="square">
+            <a:spAutoFit/>
+          </a:bodyPr>
+          <a:lstStyle/>
+          <a:p>
+            <a:r>
+              <a:rPr sz="1400" b="1">
+                <a:solidFill>
+                  <a:srgbClr val="DE911D"/>
+                </a:solidFill>
+                <a:latin typeface="Calibri"/>
+              </a:rPr>
+              <a:t>CONTENIDO PARA VER EN CLASE</a:t>
+            </a:r>
+          </a:p>
+        </p:txBody>
+      </p:sp>
+      <p:sp>
+        <p:nvSpPr>
+          <p:cNvPr id="5" name="TextBox 4"/>
+          <p:cNvSpPr txBox="1"/>
+          <p:nvPr/>
+        </p:nvSpPr>
+        <p:spPr>
+          <a:xfrm>
+            <a:off x="548640" y="1051560"/>
+            <a:ext cx="11064240" cy="822960"/>
+          </a:xfrm>
+          <a:prstGeom prst="rect">
+            <a:avLst/>
+          </a:prstGeom>
+          <a:noFill/>
+        </p:spPr>
+        <p:txBody>
+          <a:bodyPr wrap="square">
+            <a:spAutoFit/>
+          </a:bodyPr>
+          <a:lstStyle/>
+          <a:p>
+            <a:r>
+              <a:rPr sz="2600" b="1">
+                <a:solidFill>
+                  <a:srgbClr val="0A1F33"/>
+                </a:solidFill>
+                <a:latin typeface="Cambria"/>
+              </a:rPr>
+              <a:t>Sistemas de control de tiempo</a:t>
+            </a:r>
+          </a:p>
+        </p:txBody>
+      </p:sp>
+      <p:sp>
+        <p:nvSpPr>
+          <p:cNvPr id="6" name="Rectangle 5"/>
+          <p:cNvSpPr/>
+          <p:nvPr/>
+        </p:nvSpPr>
+        <p:spPr>
+          <a:xfrm>
+            <a:off x="548640" y="1874519"/>
+            <a:ext cx="11064240" cy="4389120"/>
+          </a:xfrm>
+          <a:prstGeom prst="rect">
+            <a:avLst/>
+          </a:prstGeom>
+          <a:solidFill>
+            <a:srgbClr val="F0F4F8"/>
+          </a:solidFill>
+          <a:ln>
+            <a:noFill/>
+          </a:ln>
+          <a:effectLst/>
+        </p:spPr>
+        <p:style>
+          <a:lnRef idx="1">
+            <a:schemeClr val="accent1"/>
+          </a:lnRef>
+          <a:fillRef idx="3">
+            <a:schemeClr val="accent1"/>
+          </a:fillRef>
+          <a:effectRef idx="2">
+            <a:schemeClr val="accent1"/>
+          </a:effectRef>
+          <a:fontRef idx="minor">
+            <a:schemeClr val="lt1"/>
+          </a:fontRef>
+        </p:style>
+        <p:txBody>
+          <a:bodyPr rtlCol="0" anchor="ctr"/>
+          <a:lstStyle/>
+          <a:p>
+            <a:pPr algn="ctr"/>
+          </a:p>
+        </p:txBody>
+      </p:sp>
+      <p:sp>
+        <p:nvSpPr>
+          <p:cNvPr id="7" name="TextBox 6"/>
+          <p:cNvSpPr txBox="1"/>
+          <p:nvPr/>
+        </p:nvSpPr>
+        <p:spPr>
+          <a:xfrm>
+            <a:off x="914400" y="2011680"/>
+            <a:ext cx="10332720" cy="1371600"/>
+          </a:xfrm>
+          <a:prstGeom prst="rect">
+            <a:avLst/>
+          </a:prstGeom>
+          <a:noFill/>
+        </p:spPr>
+        <p:txBody>
+          <a:bodyPr wrap="square">
+            <a:spAutoFit/>
+          </a:bodyPr>
+          <a:lstStyle/>
+          <a:p>
+            <a:r>
+              <a:rPr sz="1500" b="0">
+                <a:solidFill>
+                  <a:srgbClr val="0A1F33"/>
+                </a:solidFill>
+                <a:latin typeface="Calibri"/>
+              </a:rPr>
+              <a:t>El reloj puede funcionar de varias maneras, y quien arbitra debe saber configurarlas y explicarlas.</a:t>
+            </a:r>
+          </a:p>
+        </p:txBody>
+      </p:sp>
+      <p:sp>
+        <p:nvSpPr>
+          <p:cNvPr id="8" name="TextBox 7"/>
+          <p:cNvSpPr txBox="1"/>
+          <p:nvPr/>
+        </p:nvSpPr>
+        <p:spPr>
+          <a:xfrm>
+            <a:off x="914400" y="3429000"/>
+            <a:ext cx="10332720" cy="2743200"/>
+          </a:xfrm>
+          <a:prstGeom prst="rect">
+            <a:avLst/>
+          </a:prstGeom>
+          <a:noFill/>
+        </p:spPr>
+        <p:txBody>
+          <a:bodyPr wrap="square">
+            <a:spAutoFit/>
+          </a:bodyPr>
+          <a:lstStyle/>
+          <a:p>
+            <a:pPr>
+              <a:spcAft>
+                <a:spcPts val="800"/>
+              </a:spcAft>
+            </a:pPr>
+            <a:r>
+              <a:rPr sz="1300">
+                <a:solidFill>
+                  <a:srgbClr val="334E68"/>
+                </a:solidFill>
+                <a:latin typeface="Calibri"/>
+              </a:rPr>
+              <a:t>•  Sin incremento («a finish»): un tiempo fijo para toda la partida.</a:t>
+            </a:r>
+          </a:p>
+          <a:p>
+            <a:pPr>
+              <a:spcAft>
+                <a:spcPts val="800"/>
+              </a:spcAft>
+            </a:pPr>
+            <a:r>
+              <a:rPr sz="1300">
+                <a:solidFill>
+                  <a:srgbClr val="334E68"/>
+                </a:solidFill>
+                <a:latin typeface="Calibri"/>
+              </a:rPr>
+              <a:t>•  Incremento o tiempo Fischer: se suma un tiempo fijo después de cada jugada, desde la primera.</a:t>
+            </a:r>
+          </a:p>
+          <a:p>
+            <a:pPr>
+              <a:spcAft>
+                <a:spcPts val="800"/>
+              </a:spcAft>
+            </a:pPr>
+            <a:r>
+              <a:rPr sz="1300">
+                <a:solidFill>
+                  <a:srgbClr val="334E68"/>
+                </a:solidFill>
+                <a:latin typeface="Calibri"/>
+              </a:rPr>
+              <a:t>•  Demora (delay): cada jugada trae un tiempo fijo; el tiempo principal empieza a descontarse cuando ese tiempo se agota.</a:t>
+            </a:r>
+          </a:p>
+          <a:p>
+            <a:pPr>
+              <a:spcAft>
+                <a:spcPts val="800"/>
+              </a:spcAft>
+            </a:pPr>
+            <a:r>
+              <a:rPr sz="1300">
+                <a:solidFill>
+                  <a:srgbClr val="334E68"/>
+                </a:solidFill>
+                <a:latin typeface="Calibri"/>
+              </a:rPr>
+              <a:t>•  Por períodos: por ejemplo, 40 jugadas en 90 minutos y luego 30 minutos más; el tiempo nuevo se suma al completar la jugada 40.</a:t>
+            </a:r>
+          </a:p>
+          <a:p>
+            <a:pPr>
+              <a:spcAft>
+                <a:spcPts val="800"/>
+              </a:spcAft>
+            </a:pPr>
+            <a:r>
+              <a:rPr sz="1300">
+                <a:solidFill>
+                  <a:srgbClr val="334E68"/>
+                </a:solidFill>
+                <a:latin typeface="Calibri"/>
+              </a:rPr>
+              <a:t>•  Con menos de 5 minutos y sin incremento de al menos 30 segundos, el jugador puede dejar de anotar.</a:t>
+            </a:r>
+          </a:p>
+        </p:txBody>
+      </p:sp>
+      <p:sp>
+        <p:nvSpPr>
+          <p:cNvPr id="9" name="TextBox 8"/>
+          <p:cNvSpPr txBox="1"/>
+          <p:nvPr/>
+        </p:nvSpPr>
+        <p:spPr>
+          <a:xfrm>
+            <a:off x="548640" y="6355080"/>
+            <a:ext cx="11064240" cy="365760"/>
+          </a:xfrm>
+          <a:prstGeom prst="rect">
+            <a:avLst/>
+          </a:prstGeom>
+          <a:noFill/>
+        </p:spPr>
+        <p:txBody>
+          <a:bodyPr wrap="square">
+            <a:spAutoFit/>
+          </a:bodyPr>
+          <a:lstStyle/>
+          <a:p>
+            <a:r>
+              <a:rPr sz="1100" b="0">
+                <a:solidFill>
+                  <a:srgbClr val="627D98"/>
+                </a:solidFill>
+                <a:latin typeface="Calibri"/>
+              </a:rPr>
+              <a:t>Fuente: Leyes del Ajedrez 2023 (Handbook E.I.01), art. 6.3 y 8.4</a:t>
+            </a:r>
+          </a:p>
+        </p:txBody>
+      </p:sp>
+    </p:spTree>
+  </p:cSld>
+  <p:clrMapOvr>
+    <a:masterClrMapping/>
+  </p:clrMapOvr>
+</p:sld>
+</file>
+
+<file path=ppt/slides/slide6.xml><?xml version="1.0" encoding="utf-8"?>
+<p:sld xmlns:a="http://schemas.openxmlformats.org/drawingml/2006/main" xmlns:p="http://schemas.openxmlformats.org/presentationml/2006/main" xmlns:r="http://schemas.openxmlformats.org/officeDocument/2006/relationships">
+  <p:cSld>
+    <p:spTree>
+      <p:nvGrpSpPr>
+        <p:cNvPr id="1" name=""/>
+        <p:cNvGrpSpPr/>
+        <p:nvPr/>
+      </p:nvGrpSpPr>
+      <p:grpSpPr/>
+      <p:sp>
+        <p:nvSpPr>
+          <p:cNvPr id="2" name="Oval 1"/>
+          <p:cNvSpPr/>
+          <p:nvPr/>
+        </p:nvSpPr>
+        <p:spPr>
+          <a:xfrm>
+            <a:off x="548640" y="502920"/>
+            <a:ext cx="502920" cy="502920"/>
+          </a:xfrm>
+          <a:prstGeom prst="ellipse">
+            <a:avLst/>
+          </a:prstGeom>
+          <a:solidFill>
+            <a:srgbClr val="DE911D"/>
+          </a:solidFill>
+          <a:ln>
+            <a:noFill/>
+          </a:ln>
+          <a:effectLst/>
+        </p:spPr>
+        <p:style>
+          <a:lnRef idx="1">
+            <a:schemeClr val="accent1"/>
+          </a:lnRef>
+          <a:fillRef idx="3">
+            <a:schemeClr val="accent1"/>
+          </a:fillRef>
+          <a:effectRef idx="2">
+            <a:schemeClr val="accent1"/>
+          </a:effectRef>
+          <a:fontRef idx="minor">
+            <a:schemeClr val="lt1"/>
+          </a:fontRef>
+        </p:style>
+        <p:txBody>
+          <a:bodyPr rtlCol="0" anchor="ctr"/>
+          <a:lstStyle/>
+          <a:p>
+            <a:pPr algn="ctr"/>
+          </a:p>
+        </p:txBody>
+      </p:sp>
+      <p:sp>
+        <p:nvSpPr>
+          <p:cNvPr id="3" name="TextBox 2"/>
+          <p:cNvSpPr txBox="1"/>
+          <p:nvPr/>
+        </p:nvSpPr>
+        <p:spPr>
+          <a:xfrm>
+            <a:off x="548640" y="502920"/>
+            <a:ext cx="502920" cy="502920"/>
+          </a:xfrm>
+          <a:prstGeom prst="rect">
+            <a:avLst/>
+          </a:prstGeom>
+          <a:noFill/>
+        </p:spPr>
+        <p:txBody>
+          <a:bodyPr wrap="square">
+            <a:spAutoFit/>
+          </a:bodyPr>
+          <a:lstStyle/>
+          <a:p>
+            <a:pPr algn="ctr"/>
+            <a:r>
+              <a:rPr sz="2000" b="0">
+                <a:solidFill>
+                  <a:srgbClr val="0A1F33"/>
+                </a:solidFill>
+                <a:latin typeface="Calibri"/>
+              </a:rPr>
+              <a:t>⚖</a:t>
+            </a:r>
+          </a:p>
+        </p:txBody>
+      </p:sp>
+      <p:sp>
+        <p:nvSpPr>
+          <p:cNvPr id="4" name="TextBox 3"/>
+          <p:cNvSpPr txBox="1"/>
+          <p:nvPr/>
+        </p:nvSpPr>
+        <p:spPr>
+          <a:xfrm>
+            <a:off x="1234440" y="530352"/>
+            <a:ext cx="9144000" cy="457200"/>
+          </a:xfrm>
+          <a:prstGeom prst="rect">
+            <a:avLst/>
+          </a:prstGeom>
+          <a:noFill/>
+        </p:spPr>
+        <p:txBody>
+          <a:bodyPr wrap="square">
+            <a:spAutoFit/>
+          </a:bodyPr>
+          <a:lstStyle/>
+          <a:p>
+            <a:r>
+              <a:rPr sz="1400" b="1">
+                <a:solidFill>
+                  <a:srgbClr val="DE911D"/>
+                </a:solidFill>
+                <a:latin typeface="Calibri"/>
+              </a:rPr>
+              <a:t>CONTENIDO PARA VER EN CLASE</a:t>
+            </a:r>
+          </a:p>
+        </p:txBody>
+      </p:sp>
+      <p:sp>
+        <p:nvSpPr>
+          <p:cNvPr id="5" name="TextBox 4"/>
+          <p:cNvSpPr txBox="1"/>
+          <p:nvPr/>
+        </p:nvSpPr>
+        <p:spPr>
+          <a:xfrm>
+            <a:off x="548640" y="1051560"/>
+            <a:ext cx="11064240" cy="822960"/>
+          </a:xfrm>
+          <a:prstGeom prst="rect">
+            <a:avLst/>
+          </a:prstGeom>
+          <a:noFill/>
+        </p:spPr>
+        <p:txBody>
+          <a:bodyPr wrap="square">
+            <a:spAutoFit/>
+          </a:bodyPr>
+          <a:lstStyle/>
+          <a:p>
+            <a:r>
+              <a:rPr sz="2600" b="1">
+                <a:solidFill>
+                  <a:srgbClr val="0A1F33"/>
+                </a:solidFill>
+                <a:latin typeface="Cambria"/>
+              </a:rPr>
+              <a:t>Configurar el reloj según la modalidad</a:t>
+            </a:r>
+          </a:p>
+        </p:txBody>
+      </p:sp>
+      <p:sp>
+        <p:nvSpPr>
+          <p:cNvPr id="6" name="Rectangle 5"/>
+          <p:cNvSpPr/>
+          <p:nvPr/>
+        </p:nvSpPr>
+        <p:spPr>
+          <a:xfrm>
+            <a:off x="548640" y="1874519"/>
+            <a:ext cx="11064240" cy="4389120"/>
+          </a:xfrm>
+          <a:prstGeom prst="rect">
+            <a:avLst/>
+          </a:prstGeom>
+          <a:solidFill>
+            <a:srgbClr val="F0F4F8"/>
+          </a:solidFill>
+          <a:ln>
+            <a:noFill/>
+          </a:ln>
+          <a:effectLst/>
+        </p:spPr>
+        <p:style>
+          <a:lnRef idx="1">
+            <a:schemeClr val="accent1"/>
+          </a:lnRef>
+          <a:fillRef idx="3">
+            <a:schemeClr val="accent1"/>
+          </a:fillRef>
+          <a:effectRef idx="2">
+            <a:schemeClr val="accent1"/>
+          </a:effectRef>
+          <a:fontRef idx="minor">
+            <a:schemeClr val="lt1"/>
+          </a:fontRef>
+        </p:style>
+        <p:txBody>
+          <a:bodyPr rtlCol="0" anchor="ctr"/>
+          <a:lstStyle/>
+          <a:p>
+            <a:pPr algn="ctr"/>
+          </a:p>
+        </p:txBody>
+      </p:sp>
+      <p:sp>
+        <p:nvSpPr>
+          <p:cNvPr id="7" name="TextBox 6"/>
+          <p:cNvSpPr txBox="1"/>
+          <p:nvPr/>
+        </p:nvSpPr>
+        <p:spPr>
+          <a:xfrm>
+            <a:off x="914400" y="2011680"/>
+            <a:ext cx="10332720" cy="1371600"/>
+          </a:xfrm>
+          <a:prstGeom prst="rect">
+            <a:avLst/>
+          </a:prstGeom>
+          <a:noFill/>
+        </p:spPr>
+        <p:txBody>
+          <a:bodyPr wrap="square">
+            <a:spAutoFit/>
+          </a:bodyPr>
+          <a:lstStyle/>
+          <a:p>
+            <a:r>
+              <a:rPr sz="1500" b="0">
+                <a:solidFill>
+                  <a:srgbClr val="0A1F33"/>
+                </a:solidFill>
+                <a:latin typeface="Calibri"/>
+              </a:rPr>
+              <a:t>Antes de la ronda se configuran y revisan todos los relojes con el ritmo que anuncia el reglamento del torneo. Un reloj mal configurado es la causa de muchas incidencias que después no tienen buena solución.</a:t>
+            </a:r>
+          </a:p>
+        </p:txBody>
+      </p:sp>
+      <p:sp>
+        <p:nvSpPr>
+          <p:cNvPr id="8" name="TextBox 7"/>
+          <p:cNvSpPr txBox="1"/>
+          <p:nvPr/>
+        </p:nvSpPr>
+        <p:spPr>
+          <a:xfrm>
+            <a:off x="914400" y="3429000"/>
+            <a:ext cx="10332720" cy="2743200"/>
+          </a:xfrm>
+          <a:prstGeom prst="rect">
+            <a:avLst/>
+          </a:prstGeom>
+          <a:noFill/>
+        </p:spPr>
+        <p:txBody>
+          <a:bodyPr wrap="square">
+            <a:spAutoFit/>
+          </a:bodyPr>
+          <a:lstStyle/>
+          <a:p>
+            <a:pPr>
+              <a:spcAft>
+                <a:spcPts val="800"/>
+              </a:spcAft>
+            </a:pPr>
+            <a:r>
+              <a:rPr sz="1500">
+                <a:solidFill>
+                  <a:srgbClr val="334E68"/>
+                </a:solidFill>
+                <a:latin typeface="Calibri"/>
+              </a:rPr>
+              <a:t>•  Revisa el tiempo base, el incremento y, si lo hay, el período siguiente.</a:t>
+            </a:r>
+          </a:p>
+          <a:p>
+            <a:pPr>
+              <a:spcAft>
+                <a:spcPts val="800"/>
+              </a:spcAft>
+            </a:pPr>
+            <a:r>
+              <a:rPr sz="1500">
+                <a:solidFill>
+                  <a:srgbClr val="334E68"/>
+                </a:solidFill>
+                <a:latin typeface="Calibri"/>
+              </a:rPr>
+              <a:t>•  Comprueba que los dos lados muestren el mismo tiempo antes de empezar.</a:t>
+            </a:r>
+          </a:p>
+          <a:p>
+            <a:pPr>
+              <a:spcAft>
+                <a:spcPts val="800"/>
+              </a:spcAft>
+            </a:pPr>
+            <a:r>
+              <a:rPr sz="1500">
+                <a:solidFill>
+                  <a:srgbClr val="334E68"/>
+                </a:solidFill>
+                <a:latin typeface="Calibri"/>
+              </a:rPr>
+              <a:t>•  Deja relojes de repuesto configurados.</a:t>
+            </a:r>
+          </a:p>
+          <a:p>
+            <a:pPr>
+              <a:spcAft>
+                <a:spcPts val="800"/>
+              </a:spcAft>
+            </a:pPr>
+            <a:r>
+              <a:rPr sz="1500">
+                <a:solidFill>
+                  <a:srgbClr val="334E68"/>
+                </a:solidFill>
+                <a:latin typeface="Calibri"/>
+              </a:rPr>
+              <a:t>•  Si a mitad de partida se descubre un reloj mal configurado o con un defecto evidente, el árbitro lo corrige o lo reemplaza y fija los tiempos con su criterio.</a:t>
+            </a:r>
+          </a:p>
+        </p:txBody>
+      </p:sp>
+      <p:sp>
+        <p:nvSpPr>
+          <p:cNvPr id="9" name="TextBox 8"/>
+          <p:cNvSpPr txBox="1"/>
+          <p:nvPr/>
+        </p:nvSpPr>
+        <p:spPr>
+          <a:xfrm>
+            <a:off x="548640" y="6355080"/>
+            <a:ext cx="11064240" cy="365760"/>
+          </a:xfrm>
+          <a:prstGeom prst="rect">
+            <a:avLst/>
+          </a:prstGeom>
+          <a:noFill/>
+        </p:spPr>
+        <p:txBody>
+          <a:bodyPr wrap="square">
+            <a:spAutoFit/>
+          </a:bodyPr>
+          <a:lstStyle/>
+          <a:p>
+            <a:r>
+              <a:rPr sz="1100" b="0">
+                <a:solidFill>
+                  <a:srgbClr val="627D98"/>
+                </a:solidFill>
+                <a:latin typeface="Calibri"/>
+              </a:rPr>
+              <a:t>Fuente: Leyes del Ajedrez 2023 (Handbook E.I.01), art. 6.10</a:t>
+            </a:r>
+          </a:p>
+        </p:txBody>
+      </p:sp>
+    </p:spTree>
+  </p:cSld>
+  <p:clrMapOvr>
+    <a:masterClrMapping/>
+  </p:clrMapOvr>
+</p:sld>
+</file>
+
+<file path=ppt/slides/slide7.xml><?xml version="1.0" encoding="utf-8"?>
+<p:sld xmlns:a="http://schemas.openxmlformats.org/drawingml/2006/main" xmlns:p="http://schemas.openxmlformats.org/presentationml/2006/main" xmlns:r="http://schemas.openxmlformats.org/officeDocument/2006/relationships">
+  <p:cSld>
+    <p:spTree>
+      <p:nvGrpSpPr>
+        <p:cNvPr id="1" name=""/>
+        <p:cNvGrpSpPr/>
+        <p:nvPr/>
+      </p:nvGrpSpPr>
+      <p:grpSpPr/>
+      <p:sp>
+        <p:nvSpPr>
+          <p:cNvPr id="2" name="Oval 1"/>
+          <p:cNvSpPr/>
+          <p:nvPr/>
+        </p:nvSpPr>
+        <p:spPr>
+          <a:xfrm>
+            <a:off x="548640" y="502920"/>
+            <a:ext cx="502920" cy="502920"/>
+          </a:xfrm>
+          <a:prstGeom prst="ellipse">
+            <a:avLst/>
+          </a:prstGeom>
+          <a:solidFill>
+            <a:srgbClr val="DE911D"/>
+          </a:solidFill>
+          <a:ln>
+            <a:noFill/>
+          </a:ln>
+          <a:effectLst/>
+        </p:spPr>
+        <p:style>
+          <a:lnRef idx="1">
+            <a:schemeClr val="accent1"/>
+          </a:lnRef>
+          <a:fillRef idx="3">
+            <a:schemeClr val="accent1"/>
+          </a:fillRef>
+          <a:effectRef idx="2">
+            <a:schemeClr val="accent1"/>
+          </a:effectRef>
+          <a:fontRef idx="minor">
+            <a:schemeClr val="lt1"/>
+          </a:fontRef>
+        </p:style>
+        <p:txBody>
+          <a:bodyPr rtlCol="0" anchor="ctr"/>
+          <a:lstStyle/>
+          <a:p>
+            <a:pPr algn="ctr"/>
+          </a:p>
+        </p:txBody>
+      </p:sp>
+      <p:sp>
+        <p:nvSpPr>
+          <p:cNvPr id="3" name="TextBox 2"/>
+          <p:cNvSpPr txBox="1"/>
+          <p:nvPr/>
+        </p:nvSpPr>
+        <p:spPr>
+          <a:xfrm>
+            <a:off x="548640" y="502920"/>
+            <a:ext cx="502920" cy="502920"/>
+          </a:xfrm>
+          <a:prstGeom prst="rect">
+            <a:avLst/>
+          </a:prstGeom>
+          <a:noFill/>
+        </p:spPr>
+        <p:txBody>
+          <a:bodyPr wrap="square">
+            <a:spAutoFit/>
+          </a:bodyPr>
+          <a:lstStyle/>
+          <a:p>
+            <a:pPr algn="ctr"/>
+            <a:r>
+              <a:rPr sz="2000" b="0">
+                <a:solidFill>
+                  <a:srgbClr val="0A1F33"/>
+                </a:solidFill>
+                <a:latin typeface="Calibri"/>
+              </a:rPr>
+              <a:t>⚖</a:t>
+            </a:r>
+          </a:p>
+        </p:txBody>
+      </p:sp>
+      <p:sp>
+        <p:nvSpPr>
+          <p:cNvPr id="4" name="TextBox 3"/>
+          <p:cNvSpPr txBox="1"/>
+          <p:nvPr/>
+        </p:nvSpPr>
+        <p:spPr>
+          <a:xfrm>
+            <a:off x="1234440" y="530352"/>
+            <a:ext cx="9144000" cy="457200"/>
+          </a:xfrm>
+          <a:prstGeom prst="rect">
+            <a:avLst/>
+          </a:prstGeom>
+          <a:noFill/>
+        </p:spPr>
+        <p:txBody>
+          <a:bodyPr wrap="square">
+            <a:spAutoFit/>
+          </a:bodyPr>
+          <a:lstStyle/>
+          <a:p>
+            <a:r>
+              <a:rPr sz="1400" b="1">
+                <a:solidFill>
+                  <a:srgbClr val="DE911D"/>
+                </a:solidFill>
+                <a:latin typeface="Calibri"/>
+              </a:rPr>
+              <a:t>CONTENIDO PARA VER EN CLASE</a:t>
+            </a:r>
+          </a:p>
+        </p:txBody>
+      </p:sp>
+      <p:sp>
+        <p:nvSpPr>
+          <p:cNvPr id="5" name="TextBox 4"/>
+          <p:cNvSpPr txBox="1"/>
+          <p:nvPr/>
+        </p:nvSpPr>
+        <p:spPr>
+          <a:xfrm>
+            <a:off x="548640" y="1051560"/>
+            <a:ext cx="11064240" cy="822960"/>
+          </a:xfrm>
+          <a:prstGeom prst="rect">
+            <a:avLst/>
+          </a:prstGeom>
+          <a:noFill/>
+        </p:spPr>
+        <p:txBody>
+          <a:bodyPr wrap="square">
+            <a:spAutoFit/>
+          </a:bodyPr>
+          <a:lstStyle/>
+          <a:p>
+            <a:r>
+              <a:rPr sz="2600" b="1">
+                <a:solidFill>
+                  <a:srgbClr val="0A1F33"/>
+                </a:solidFill>
+                <a:latin typeface="Cambria"/>
+              </a:rPr>
+              <a:t>Caída de bandera e incidencias de tiempo</a:t>
+            </a:r>
+          </a:p>
+        </p:txBody>
+      </p:sp>
+      <p:sp>
+        <p:nvSpPr>
+          <p:cNvPr id="6" name="Rectangle 5"/>
+          <p:cNvSpPr/>
+          <p:nvPr/>
+        </p:nvSpPr>
+        <p:spPr>
+          <a:xfrm>
+            <a:off x="548640" y="1874519"/>
+            <a:ext cx="11064240" cy="4389120"/>
+          </a:xfrm>
+          <a:prstGeom prst="rect">
+            <a:avLst/>
+          </a:prstGeom>
+          <a:solidFill>
+            <a:srgbClr val="F0F4F8"/>
+          </a:solidFill>
+          <a:ln>
+            <a:noFill/>
+          </a:ln>
+          <a:effectLst/>
+        </p:spPr>
+        <p:style>
+          <a:lnRef idx="1">
+            <a:schemeClr val="accent1"/>
+          </a:lnRef>
+          <a:fillRef idx="3">
+            <a:schemeClr val="accent1"/>
+          </a:fillRef>
+          <a:effectRef idx="2">
+            <a:schemeClr val="accent1"/>
+          </a:effectRef>
+          <a:fontRef idx="minor">
+            <a:schemeClr val="lt1"/>
+          </a:fontRef>
+        </p:style>
+        <p:txBody>
+          <a:bodyPr rtlCol="0" anchor="ctr"/>
+          <a:lstStyle/>
+          <a:p>
+            <a:pPr algn="ctr"/>
+          </a:p>
+        </p:txBody>
+      </p:sp>
+      <p:sp>
+        <p:nvSpPr>
+          <p:cNvPr id="7" name="TextBox 6"/>
+          <p:cNvSpPr txBox="1"/>
+          <p:nvPr/>
+        </p:nvSpPr>
+        <p:spPr>
+          <a:xfrm>
+            <a:off x="914400" y="2011680"/>
+            <a:ext cx="10332720" cy="1371600"/>
+          </a:xfrm>
+          <a:prstGeom prst="rect">
+            <a:avLst/>
+          </a:prstGeom>
+          <a:noFill/>
+        </p:spPr>
+        <p:txBody>
+          <a:bodyPr wrap="square">
+            <a:spAutoFit/>
+          </a:bodyPr>
+          <a:lstStyle/>
+          <a:p>
+            <a:r>
+              <a:rPr sz="1500" b="0">
+                <a:solidFill>
+                  <a:srgbClr val="0A1F33"/>
+                </a:solidFill>
+                <a:latin typeface="Calibri"/>
+              </a:rPr>
+              <a:t>Cuando a un jugador se le agota el tiempo, pierde la partida, salvo que el rival no pueda dar mate por ninguna serie de jugadas legales: en ese caso son tablas. La prueba es «cualquier serie de jugadas legales», aunque sea con la peor defensa.</a:t>
+            </a:r>
+          </a:p>
+        </p:txBody>
+      </p:sp>
+      <p:sp>
+        <p:nvSpPr>
+          <p:cNvPr id="8" name="TextBox 7"/>
+          <p:cNvSpPr txBox="1"/>
+          <p:nvPr/>
+        </p:nvSpPr>
+        <p:spPr>
+          <a:xfrm>
+            <a:off x="914400" y="3429000"/>
+            <a:ext cx="10332720" cy="2743200"/>
+          </a:xfrm>
+          <a:prstGeom prst="rect">
+            <a:avLst/>
+          </a:prstGeom>
+          <a:noFill/>
+        </p:spPr>
+        <p:txBody>
+          <a:bodyPr wrap="square">
+            <a:spAutoFit/>
+          </a:bodyPr>
+          <a:lstStyle/>
+          <a:p>
+            <a:pPr>
+              <a:spcAft>
+                <a:spcPts val="800"/>
+              </a:spcAft>
+            </a:pPr>
+            <a:r>
+              <a:rPr sz="1300">
+                <a:solidFill>
+                  <a:srgbClr val="334E68"/>
+                </a:solidFill>
+                <a:latin typeface="Calibri"/>
+              </a:rPr>
+              <a:t>•  Al caer una bandera, se comprueba si el jugador cumplió el número de jugadas del control.</a:t>
+            </a:r>
+          </a:p>
+          <a:p>
+            <a:pPr>
+              <a:spcAft>
+                <a:spcPts val="800"/>
+              </a:spcAft>
+            </a:pPr>
+            <a:r>
+              <a:rPr sz="1300">
+                <a:solidFill>
+                  <a:srgbClr val="334E68"/>
+                </a:solidFill>
+                <a:latin typeface="Calibri"/>
+              </a:rPr>
+              <a:t>•  En ritmo clásico con árbitro presente, el árbitro declara la caída de bandera de oficio; en relámpago sin supervisión, la reclama el jugador.</a:t>
+            </a:r>
+          </a:p>
+          <a:p>
+            <a:pPr>
+              <a:spcAft>
+                <a:spcPts val="800"/>
+              </a:spcAft>
+            </a:pPr>
+            <a:r>
+              <a:rPr sz="1300">
+                <a:solidFill>
+                  <a:srgbClr val="334E68"/>
+                </a:solidFill>
+                <a:latin typeface="Calibri"/>
+              </a:rPr>
+              <a:t>•  Si el reglamento no fija tiempo de incomparecencia, es cero: quien llega tarde pierde, salvo decisión del árbitro.</a:t>
+            </a:r>
+          </a:p>
+          <a:p>
+            <a:pPr>
+              <a:spcAft>
+                <a:spcPts val="800"/>
+              </a:spcAft>
+            </a:pPr>
+            <a:r>
+              <a:rPr sz="1300">
+                <a:solidFill>
+                  <a:srgbClr val="334E68"/>
+                </a:solidFill>
+                <a:latin typeface="Calibri"/>
+              </a:rPr>
+              <a:t>•  En apuro de tiempo, el árbitro observa especialmente esas partidas y puede nombrar asistentes.</a:t>
+            </a:r>
+          </a:p>
+        </p:txBody>
+      </p:sp>
+      <p:sp>
+        <p:nvSpPr>
+          <p:cNvPr id="9" name="TextBox 8"/>
+          <p:cNvSpPr txBox="1"/>
+          <p:nvPr/>
+        </p:nvSpPr>
+        <p:spPr>
+          <a:xfrm>
+            <a:off x="548640" y="6355080"/>
+            <a:ext cx="11064240" cy="365760"/>
+          </a:xfrm>
+          <a:prstGeom prst="rect">
+            <a:avLst/>
+          </a:prstGeom>
+          <a:noFill/>
+        </p:spPr>
+        <p:txBody>
+          <a:bodyPr wrap="square">
+            <a:spAutoFit/>
+          </a:bodyPr>
+          <a:lstStyle/>
+          <a:p>
+            <a:r>
+              <a:rPr sz="1100" b="0">
+                <a:solidFill>
+                  <a:srgbClr val="627D98"/>
+                </a:solidFill>
+                <a:latin typeface="Calibri"/>
+              </a:rPr>
+              <a:t>Fuente: Leyes del Ajedrez 2023 (Handbook E.I.01), art. 6.4, 6.7, 6.8, 6.9, 12.3 y 12.4</a:t>
+            </a:r>
+          </a:p>
+        </p:txBody>
+      </p:sp>
+    </p:spTree>
+  </p:cSld>
+  <p:clrMapOvr>
+    <a:masterClrMapping/>
+  </p:clrMapOvr>
+</p:sld>
+</file>
+
+<file path=ppt/slides/slide8.xml><?xml version="1.0" encoding="utf-8"?>
+<p:sld xmlns:a="http://schemas.openxmlformats.org/drawingml/2006/main" xmlns:p="http://schemas.openxmlformats.org/presentationml/2006/main" xmlns:r="http://schemas.openxmlformats.org/officeDocument/2006/relationships">
+  <p:cSld>
+    <p:spTree>
+      <p:nvGrpSpPr>
+        <p:cNvPr id="1" name=""/>
+        <p:cNvGrpSpPr/>
+        <p:nvPr/>
+      </p:nvGrpSpPr>
+      <p:grpSpPr/>
+      <p:sp>
+        <p:nvSpPr>
+          <p:cNvPr id="2" name="Oval 1"/>
+          <p:cNvSpPr/>
+          <p:nvPr/>
+        </p:nvSpPr>
+        <p:spPr>
+          <a:xfrm>
+            <a:off x="548640" y="502920"/>
+            <a:ext cx="502920" cy="502920"/>
+          </a:xfrm>
+          <a:prstGeom prst="ellipse">
+            <a:avLst/>
+          </a:prstGeom>
+          <a:solidFill>
+            <a:srgbClr val="DE911D"/>
+          </a:solidFill>
+          <a:ln>
+            <a:noFill/>
+          </a:ln>
+          <a:effectLst/>
+        </p:spPr>
+        <p:style>
+          <a:lnRef idx="1">
+            <a:schemeClr val="accent1"/>
+          </a:lnRef>
+          <a:fillRef idx="3">
+            <a:schemeClr val="accent1"/>
+          </a:fillRef>
+          <a:effectRef idx="2">
+            <a:schemeClr val="accent1"/>
+          </a:effectRef>
+          <a:fontRef idx="minor">
+            <a:schemeClr val="lt1"/>
+          </a:fontRef>
+        </p:style>
+        <p:txBody>
+          <a:bodyPr rtlCol="0" anchor="ctr"/>
+          <a:lstStyle/>
+          <a:p>
+            <a:pPr algn="ctr"/>
+          </a:p>
+        </p:txBody>
+      </p:sp>
+      <p:sp>
+        <p:nvSpPr>
+          <p:cNvPr id="3" name="TextBox 2"/>
+          <p:cNvSpPr txBox="1"/>
+          <p:nvPr/>
+        </p:nvSpPr>
+        <p:spPr>
+          <a:xfrm>
+            <a:off x="548640" y="502920"/>
+            <a:ext cx="502920" cy="502920"/>
+          </a:xfrm>
+          <a:prstGeom prst="rect">
+            <a:avLst/>
+          </a:prstGeom>
+          <a:noFill/>
+        </p:spPr>
+        <p:txBody>
+          <a:bodyPr wrap="square">
+            <a:spAutoFit/>
+          </a:bodyPr>
+          <a:lstStyle/>
+          <a:p>
+            <a:pPr algn="ctr"/>
+            <a:r>
+              <a:rPr sz="2000" b="0">
+                <a:solidFill>
+                  <a:srgbClr val="0A1F33"/>
+                </a:solidFill>
+                <a:latin typeface="Calibri"/>
+              </a:rPr>
+              <a:t>?</a:t>
+            </a:r>
+          </a:p>
+        </p:txBody>
+      </p:sp>
+      <p:sp>
+        <p:nvSpPr>
+          <p:cNvPr id="4" name="TextBox 3"/>
+          <p:cNvSpPr txBox="1"/>
+          <p:nvPr/>
+        </p:nvSpPr>
+        <p:spPr>
+          <a:xfrm>
+            <a:off x="1234440" y="530352"/>
+            <a:ext cx="9144000" cy="457200"/>
+          </a:xfrm>
+          <a:prstGeom prst="rect">
+            <a:avLst/>
+          </a:prstGeom>
+          <a:noFill/>
+        </p:spPr>
+        <p:txBody>
+          <a:bodyPr wrap="square">
+            <a:spAutoFit/>
+          </a:bodyPr>
+          <a:lstStyle/>
+          <a:p>
+            <a:r>
+              <a:rPr sz="1400" b="1">
+                <a:solidFill>
+                  <a:srgbClr val="DE911D"/>
+                </a:solidFill>
+                <a:latin typeface="Calibri"/>
+              </a:rPr>
+              <a:t>CASO 1 · ¿QUÉ DECIDE LA PERSONA ÁRBITRA?</a:t>
+            </a:r>
+          </a:p>
+        </p:txBody>
+      </p:sp>
+      <p:sp>
+        <p:nvSpPr>
+          <p:cNvPr id="5" name="TextBox 4"/>
+          <p:cNvSpPr txBox="1"/>
+          <p:nvPr/>
+        </p:nvSpPr>
+        <p:spPr>
+          <a:xfrm>
+            <a:off x="548640" y="1051560"/>
+            <a:ext cx="11064240" cy="822960"/>
+          </a:xfrm>
+          <a:prstGeom prst="rect">
+            <a:avLst/>
+          </a:prstGeom>
+          <a:noFill/>
+        </p:spPr>
+        <p:txBody>
+          <a:bodyPr wrap="square">
+            <a:spAutoFit/>
+          </a:bodyPr>
+          <a:lstStyle/>
+          <a:p>
+            <a:r>
+              <a:rPr sz="2600" b="1">
+                <a:solidFill>
+                  <a:srgbClr val="0A1F33"/>
+                </a:solidFill>
+                <a:latin typeface="Cambria"/>
+              </a:rPr>
+              <a:t>Las blancas no llegaron</a:t>
+            </a:r>
+          </a:p>
+        </p:txBody>
+      </p:sp>
+      <p:sp>
+        <p:nvSpPr>
+          <p:cNvPr id="6" name="Rectangle 5"/>
+          <p:cNvSpPr/>
+          <p:nvPr/>
+        </p:nvSpPr>
+        <p:spPr>
+          <a:xfrm>
+            <a:off x="548640" y="1965960"/>
+            <a:ext cx="11064240" cy="4206240"/>
+          </a:xfrm>
+          <a:prstGeom prst="rect">
+            <a:avLst/>
+          </a:prstGeom>
+          <a:solidFill>
+            <a:srgbClr val="F0F4F8"/>
+          </a:solidFill>
+          <a:ln>
+            <a:noFill/>
+          </a:ln>
+          <a:effectLst/>
+        </p:spPr>
+        <p:style>
+          <a:lnRef idx="1">
+            <a:schemeClr val="accent1"/>
+          </a:lnRef>
+          <a:fillRef idx="3">
+            <a:schemeClr val="accent1"/>
+          </a:fillRef>
+          <a:effectRef idx="2">
+            <a:schemeClr val="accent1"/>
+          </a:effectRef>
+          <a:fontRef idx="minor">
+            <a:schemeClr val="lt1"/>
+          </a:fontRef>
+        </p:style>
+        <p:txBody>
+          <a:bodyPr rtlCol="0" anchor="ctr"/>
+          <a:lstStyle/>
+          <a:p>
+            <a:pPr algn="ctr"/>
+          </a:p>
+        </p:txBody>
+      </p:sp>
+      <p:sp>
+        <p:nvSpPr>
+          <p:cNvPr id="7" name="TextBox 6"/>
+          <p:cNvSpPr txBox="1"/>
+          <p:nvPr/>
+        </p:nvSpPr>
+        <p:spPr>
+          <a:xfrm>
+            <a:off x="914400" y="2240280"/>
+            <a:ext cx="10332720" cy="3749039"/>
+          </a:xfrm>
+          <a:prstGeom prst="rect">
+            <a:avLst/>
+          </a:prstGeom>
+          <a:noFill/>
+        </p:spPr>
+        <p:txBody>
+          <a:bodyPr wrap="square">
+            <a:spAutoFit/>
+          </a:bodyPr>
+          <a:lstStyle/>
+          <a:p>
+            <a:r>
+              <a:rPr sz="2000" b="0">
+                <a:solidFill>
+                  <a:srgbClr val="334E68"/>
+                </a:solidFill>
+                <a:latin typeface="Calibri"/>
+              </a:rPr>
+              <a:t>Es la hora de inicio y el jugador de blancas no está en la mesa. El reglamento fija 15 minutos de incomparecencia.</a:t>
+            </a:r>
+          </a:p>
+        </p:txBody>
+      </p:sp>
+    </p:spTree>
+  </p:cSld>
+  <p:clrMapOvr>
+    <a:masterClrMapping/>
+  </p:clrMapOvr>
+</p:sld>
+</file>
+
+<file path=ppt/slides/slide9.xml><?xml version="1.0" encoding="utf-8"?>
+<p:sld xmlns:a="http://schemas.openxmlformats.org/drawingml/2006/main" xmlns:p="http://schemas.openxmlformats.org/presentationml/2006/main" xmlns:r="http://schemas.openxmlformats.org/officeDocument/2006/relationships">
+  <p:cSld>
+    <p:spTree>
+      <p:nvGrpSpPr>
+        <p:cNvPr id="1" name=""/>
+        <p:cNvGrpSpPr/>
+        <p:nvPr/>
+      </p:nvGrpSpPr>
+      <p:grpSpPr/>
+      <p:sp>
+        <p:nvSpPr>
           <p:cNvPr id="2" name="Rectangle 1"/>
           <p:cNvSpPr/>
           <p:nvPr/>
@@ -4266,102 +9589,14 @@
       </p:sp>
       <p:sp>
         <p:nvSpPr>
-          <p:cNvPr id="3" name="Oval 2"/>
-          <p:cNvSpPr/>
-          <p:nvPr/>
-        </p:nvSpPr>
-        <p:spPr>
-          <a:xfrm>
-            <a:off x="-1280160" y="-1463040"/>
-            <a:ext cx="4114800" cy="4114800"/>
-          </a:xfrm>
-          <a:prstGeom prst="ellipse">
-            <a:avLst/>
-          </a:prstGeom>
-          <a:solidFill>
-            <a:srgbClr val="0A1F33"/>
-          </a:solidFill>
-          <a:ln>
-            <a:noFill/>
-          </a:ln>
-          <a:effectLst/>
-        </p:spPr>
-        <p:style>
-          <a:lnRef idx="1">
-            <a:schemeClr val="accent1"/>
-          </a:lnRef>
-          <a:fillRef idx="3">
-            <a:schemeClr val="accent1"/>
-          </a:fillRef>
-          <a:effectRef idx="2">
-            <a:schemeClr val="accent1"/>
-          </a:effectRef>
-          <a:fontRef idx="minor">
-            <a:schemeClr val="lt1"/>
-          </a:fontRef>
-        </p:style>
-        <p:txBody>
-          <a:bodyPr rtlCol="0" anchor="ctr"/>
-          <a:lstStyle/>
-          <a:p>
-            <a:pPr algn="ctr"/>
-          </a:p>
-        </p:txBody>
-      </p:sp>
-      <p:sp>
-        <p:nvSpPr>
-          <p:cNvPr id="4" name="Oval 3"/>
-          <p:cNvSpPr/>
-          <p:nvPr/>
-        </p:nvSpPr>
-        <p:spPr>
-          <a:xfrm>
-            <a:off x="5175504" y="822960"/>
-            <a:ext cx="1828800" cy="1828800"/>
-          </a:xfrm>
-          <a:prstGeom prst="ellipse">
-            <a:avLst/>
-          </a:prstGeom>
-          <a:solidFill>
-            <a:srgbClr val="DE911D"/>
-          </a:solidFill>
-          <a:ln>
-            <a:noFill/>
-          </a:ln>
-          <a:effectLst/>
-        </p:spPr>
-        <p:style>
-          <a:lnRef idx="1">
-            <a:schemeClr val="accent1"/>
-          </a:lnRef>
-          <a:fillRef idx="3">
-            <a:schemeClr val="accent1"/>
-          </a:fillRef>
-          <a:effectRef idx="2">
-            <a:schemeClr val="accent1"/>
-          </a:effectRef>
-          <a:fontRef idx="minor">
-            <a:schemeClr val="lt1"/>
-          </a:fontRef>
-        </p:style>
-        <p:txBody>
-          <a:bodyPr rtlCol="0" anchor="ctr"/>
-          <a:lstStyle/>
-          <a:p>
-            <a:pPr algn="ctr"/>
-          </a:p>
-        </p:txBody>
-      </p:sp>
-      <p:sp>
-        <p:nvSpPr>
-          <p:cNvPr id="5" name="TextBox 4"/>
+          <p:cNvPr id="3" name="TextBox 2"/>
           <p:cNvSpPr txBox="1"/>
           <p:nvPr/>
         </p:nvSpPr>
         <p:spPr>
           <a:xfrm>
-            <a:off x="5175504" y="822960"/>
-            <a:ext cx="1828800" cy="1828800"/>
+            <a:off x="548640" y="548640"/>
+            <a:ext cx="11064240" cy="457200"/>
           </a:xfrm>
           <a:prstGeom prst="rect">
             <a:avLst/>
@@ -4374,29 +9609,28 @@
           </a:bodyPr>
           <a:lstStyle/>
           <a:p>
-            <a:pPr algn="ctr"/>
-            <a:r>
-              <a:rPr sz="4400" b="1">
-                <a:solidFill>
-                  <a:srgbClr val="0A1F33"/>
+            <a:r>
+              <a:rPr sz="1400" b="1">
+                <a:solidFill>
+                  <a:srgbClr val="F0B429"/>
                 </a:solidFill>
                 <a:latin typeface="Calibri"/>
               </a:rPr>
-              <a:t>✔</a:t>
-            </a:r>
-          </a:p>
-        </p:txBody>
-      </p:sp>
-      <p:sp>
-        <p:nvSpPr>
-          <p:cNvPr id="6" name="TextBox 5"/>
+              <a:t>CASO 1 · DECISIÓN</a:t>
+            </a:r>
+          </a:p>
+        </p:txBody>
+      </p:sp>
+      <p:sp>
+        <p:nvSpPr>
+          <p:cNvPr id="4" name="TextBox 3"/>
           <p:cNvSpPr txBox="1"/>
           <p:nvPr/>
         </p:nvSpPr>
         <p:spPr>
           <a:xfrm>
-            <a:off x="548640" y="2880360"/>
-            <a:ext cx="11064240" cy="457200"/>
+            <a:off x="548640" y="1051560"/>
+            <a:ext cx="11064240" cy="822960"/>
           </a:xfrm>
           <a:prstGeom prst="rect">
             <a:avLst/>
@@ -4409,29 +9643,28 @@
           </a:bodyPr>
           <a:lstStyle/>
           <a:p>
-            <a:pPr algn="ctr"/>
-            <a:r>
-              <a:rPr sz="1400" b="1">
-                <a:solidFill>
-                  <a:srgbClr val="F0B429"/>
-                </a:solidFill>
-                <a:latin typeface="Calibri"/>
-              </a:rPr>
-              <a:t>PRÁCTICA — CONFIGURACIÓN DE UN RELOJ SEGÚN ESCENARIO</a:t>
-            </a:r>
-          </a:p>
-        </p:txBody>
-      </p:sp>
-      <p:sp>
-        <p:nvSpPr>
-          <p:cNvPr id="7" name="TextBox 6"/>
+            <a:r>
+              <a:rPr sz="2600" b="1">
+                <a:solidFill>
+                  <a:srgbClr val="FFFFFF"/>
+                </a:solidFill>
+                <a:latin typeface="Cambria"/>
+              </a:rPr>
+              <a:t>Las blancas no llegaron</a:t>
+            </a:r>
+          </a:p>
+        </p:txBody>
+      </p:sp>
+      <p:sp>
+        <p:nvSpPr>
+          <p:cNvPr id="5" name="TextBox 4"/>
           <p:cNvSpPr txBox="1"/>
           <p:nvPr/>
         </p:nvSpPr>
         <p:spPr>
           <a:xfrm>
-            <a:off x="1280160" y="3383280"/>
-            <a:ext cx="9601200" cy="2377440"/>
+            <a:off x="548640" y="2103120"/>
+            <a:ext cx="11064240" cy="3931920"/>
           </a:xfrm>
           <a:prstGeom prst="rect">
             <a:avLst/>
@@ -4444,22 +9677,21 @@
           </a:bodyPr>
           <a:lstStyle/>
           <a:p>
-            <a:pPr algn="ctr"/>
             <a:r>
               <a:rPr sz="2000" b="0">
                 <a:solidFill>
-                  <a:srgbClr val="FFFFFF"/>
-                </a:solidFill>
-                <a:latin typeface="Cambria"/>
-              </a:rPr>
-              <a:t>Con un simulador de reloj digital en línea, cada participante configura el control de tiempo correspondiente a tres escenarios: partida clásica, rápida y relámpago.</a:t>
-            </a:r>
-          </a:p>
-        </p:txBody>
-      </p:sp>
-      <p:sp>
-        <p:nvSpPr>
-          <p:cNvPr id="8" name="TextBox 7"/>
+                  <a:srgbClr val="CADCFC"/>
+                </a:solidFill>
+                <a:latin typeface="Calibri"/>
+              </a:rPr>
+              <a:t>Se pone en marcha el reloj de las blancas igual. Si llega antes de los 15 minutos, juega con el tiempo que le quede; si no, pierde por incomparecencia.</a:t>
+            </a:r>
+          </a:p>
+        </p:txBody>
+      </p:sp>
+      <p:sp>
+        <p:nvSpPr>
+          <p:cNvPr id="6" name="TextBox 5"/>
           <p:cNvSpPr txBox="1"/>
           <p:nvPr/>
         </p:nvSpPr>
@@ -4479,15 +9711,14 @@
           </a:bodyPr>
           <a:lstStyle/>
           <a:p>
-            <a:pPr algn="ctr"/>
-            <a:r>
-              <a:rPr sz="1200" b="0">
+            <a:r>
+              <a:rPr sz="1100" b="0">
                 <a:solidFill>
                   <a:srgbClr val="9FB3C8"/>
                 </a:solidFill>
                 <a:latin typeface="Calibri"/>
               </a:rPr>
-              <a:t>Formación Ajedrez · Sesión 5</a:t>
+              <a:t>Fuente: Leyes del Ajedrez 2023 (Handbook E.I.01), art. 6.6 y 6.7</a:t>
             </a:r>
           </a:p>
         </p:txBody>

--- a/cursos/recursos/formacion-ajedrez/05-uso-y-control-del-reloj.pptx
+++ b/cursos/recursos/formacion-ajedrez/05-uso-y-control-del-reloj.pptx
@@ -6648,7 +6648,7 @@
               </a:spcAft>
             </a:pPr>
             <a:r>
-              <a:rPr sz="1400">
+              <a:rPr sz="1200">
                 <a:solidFill>
                   <a:srgbClr val="334E68"/>
                 </a:solidFill>
@@ -6664,7 +6664,7 @@
               </a:spcAft>
             </a:pPr>
             <a:r>
-              <a:rPr sz="1400">
+              <a:rPr sz="1200">
                 <a:solidFill>
                   <a:srgbClr val="334E68"/>
                 </a:solidFill>
@@ -6680,7 +6680,7 @@
               </a:spcAft>
             </a:pPr>
             <a:r>
-              <a:rPr sz="1400">
+              <a:rPr sz="1200">
                 <a:solidFill>
                   <a:srgbClr val="334E68"/>
                 </a:solidFill>
@@ -6696,7 +6696,7 @@
               </a:spcAft>
             </a:pPr>
             <a:r>
-              <a:rPr sz="1400">
+              <a:rPr sz="1200">
                 <a:solidFill>
                   <a:srgbClr val="334E68"/>
                 </a:solidFill>
@@ -6712,7 +6712,7 @@
               </a:spcAft>
             </a:pPr>
             <a:r>
-              <a:rPr sz="1400">
+              <a:rPr sz="1200">
                 <a:solidFill>
                   <a:srgbClr val="334E68"/>
                 </a:solidFill>
@@ -6728,13 +6728,93 @@
               </a:spcAft>
             </a:pPr>
             <a:r>
-              <a:rPr sz="1400">
+              <a:rPr sz="1200">
                 <a:solidFill>
                   <a:srgbClr val="334E68"/>
                 </a:solidFill>
                 <a:latin typeface="Calibri"/>
               </a:rPr>
               <a:t>6. Si el reglamento no fija tiempo de incomparecencia, ¿cuál es?</a:t>
+            </a:r>
+          </a:p>
+          <a:p>
+            <a:pPr>
+              <a:spcAft>
+                <a:spcPts val="600"/>
+              </a:spcAft>
+            </a:pPr>
+            <a:r>
+              <a:rPr sz="1200">
+                <a:solidFill>
+                  <a:srgbClr val="334E68"/>
+                </a:solidFill>
+                <a:latin typeface="Calibri"/>
+              </a:rPr>
+              <a:t>7. ¿Puede un jugador acomodar sus propias piezas mientras el reloj del rival está en marcha?</a:t>
+            </a:r>
+          </a:p>
+          <a:p>
+            <a:pPr>
+              <a:spcAft>
+                <a:spcPts val="600"/>
+              </a:spcAft>
+            </a:pPr>
+            <a:r>
+              <a:rPr sz="1200">
+                <a:solidFill>
+                  <a:srgbClr val="334E68"/>
+                </a:solidFill>
+                <a:latin typeface="Calibri"/>
+              </a:rPr>
+              <a:t>8. Con menos de 5 minutos y sin incremento de al menos 30 segundos, ¿está obligado el jugador a seguir anotando?</a:t>
+            </a:r>
+          </a:p>
+          <a:p>
+            <a:pPr>
+              <a:spcAft>
+                <a:spcPts val="600"/>
+              </a:spcAft>
+            </a:pPr>
+            <a:r>
+              <a:rPr sz="1200">
+                <a:solidFill>
+                  <a:srgbClr val="334E68"/>
+                </a:solidFill>
+                <a:latin typeface="Calibri"/>
+              </a:rPr>
+              <a:t>9. En ritmo clásico con árbitro presente, ¿quién declara la caída de una bandera?</a:t>
+            </a:r>
+          </a:p>
+          <a:p>
+            <a:pPr>
+              <a:spcAft>
+                <a:spcPts val="600"/>
+              </a:spcAft>
+            </a:pPr>
+            <a:r>
+              <a:rPr sz="1200">
+                <a:solidFill>
+                  <a:srgbClr val="334E68"/>
+                </a:solidFill>
+                <a:latin typeface="Calibri"/>
+              </a:rPr>
+              <a:t>10. Si a mitad de partida se descubre que un reloj estaba mal configurado o tiene un defecto evidente, ¿qué hace el árbitro?</a:t>
+            </a:r>
+          </a:p>
+          <a:p>
+            <a:pPr>
+              <a:spcAft>
+                <a:spcPts val="600"/>
+              </a:spcAft>
+            </a:pPr>
+            <a:r>
+              <a:rPr sz="1200">
+                <a:solidFill>
+                  <a:srgbClr val="334E68"/>
+                </a:solidFill>
+                <a:latin typeface="Calibri"/>
+              </a:rPr>
+              <a:t>11. ¿Cuándo queda hecha una jugada y cuándo queda completada?</a:t>
             </a:r>
           </a:p>
         </p:txBody>
